--- a/exports/pptx/lessons/senior-module-14-magic-squares/day-04-stair-step-method.pptx
+++ b/exports/pptx/lessons/senior-module-14-magic-squares/day-04-stair-step-method.pptx
@@ -3626,7 +3626,7 @@
         <p:spPr>
           <a:xfrm>
             <a:off x="634901" y="883593"/>
-            <a:ext cx="8102798" cy="1462683"/>
+            <a:ext cx="8102798" cy="281880"/>
           </a:xfrm>
           <a:prstGeom prst="rect">
             <a:avLst/>
@@ -3657,7 +3657,7 @@
                 <a:ea typeface="Georgia" pitchFamily="34" charset="-122"/>
                 <a:cs typeface="Georgia" pitchFamily="34" charset="-120"/>
               </a:rPr>
-              <a:t>State the observable phenomenon first.</a:t>
+              <a:t>State Nārāyaṇa Paṇḍita's algorithm.</a:t>
             </a:r>
             <a:pPr algn="l" indent="0" marL="0">
               <a:lnSpc>
@@ -3677,10 +3677,80 @@
                 <a:ea typeface="Georgia" pitchFamily="34" charset="-122"/>
                 <a:cs typeface="Georgia" pitchFamily="34" charset="-120"/>
               </a:rPr>
-              <a:t> Whatever the day's idea is — a number trick, a celestial pattern, a herb's identifying feature — start with the thing students can see, hear, or do.</a:t>
+              <a:t> For any ODD n×n, follow these steps:</a:t>
             </a:r>
             <a:endParaRPr lang="en-US" sz="1200" dirty="0"/>
           </a:p>
+        </p:txBody>
+      </p:sp>
+      <p:sp>
+        <p:nvSpPr>
+          <p:cNvPr id="5" name="Text 3"/>
+          <p:cNvSpPr/>
+          <p:nvPr/>
+        </p:nvSpPr>
+        <p:spPr>
+          <a:xfrm>
+            <a:off x="406301" y="1254323"/>
+            <a:ext cx="8498026" cy="853083"/>
+          </a:xfrm>
+          <a:prstGeom prst="rect">
+            <a:avLst/>
+          </a:prstGeom>
+          <a:noFill/>
+          <a:ln/>
+        </p:spPr>
+        <p:txBody>
+          <a:bodyPr wrap="square" lIns="0" tIns="0" rIns="0" bIns="0" rtlCol="0" anchor="t"/>
+          <a:lstStyle/>
+          <a:p>
+            <a:pPr algn="l" indent="0" marL="0">
+              <a:lnSpc>
+                <a:spcPts val="1680"/>
+              </a:lnSpc>
+              <a:spcBef>
+                <a:spcPts val="300"/>
+              </a:spcBef>
+              <a:spcAft>
+                <a:spcPts val="300"/>
+              </a:spcAft>
+              <a:buNone/>
+            </a:pPr>
+            <a:r>
+              <a:rPr lang="en-US" sz="1200" dirty="0">
+                <a:solidFill>
+                  <a:srgbClr val="1A1A1A"/>
+                </a:solidFill>
+                <a:latin typeface="Georgia" pitchFamily="34" charset="0"/>
+                <a:ea typeface="Georgia" pitchFamily="34" charset="-122"/>
+                <a:cs typeface="Georgia" pitchFamily="34" charset="-120"/>
+              </a:rPr>
+              <a:t>– Step 1: Place 1 in the top-middle cell.    – Step 2: From the cell with k, move one up and one right (diagonal) to place k+1.    – Step 3: If you go off the top, wrap to the bottom (same column you'd have landed in).    – Step 4: If you go off the right, wrap to the left (same row).    – Step 5: If the target cell is occupied, place k+1 in the cell DIRECTLY BELOW the cell containing k instead.</a:t>
+            </a:r>
+            <a:endParaRPr lang="en-US" sz="1200" dirty="0"/>
+          </a:p>
+        </p:txBody>
+      </p:sp>
+      <p:sp>
+        <p:nvSpPr>
+          <p:cNvPr id="6" name="Text 4"/>
+          <p:cNvSpPr/>
+          <p:nvPr/>
+        </p:nvSpPr>
+        <p:spPr>
+          <a:xfrm>
+            <a:off x="634901" y="2196257"/>
+            <a:ext cx="8102798" cy="487561"/>
+          </a:xfrm>
+          <a:prstGeom prst="rect">
+            <a:avLst/>
+          </a:prstGeom>
+          <a:noFill/>
+          <a:ln/>
+        </p:spPr>
+        <p:txBody>
+          <a:bodyPr wrap="square" lIns="0" tIns="0" rIns="0" bIns="0" rtlCol="0" anchor="t"/>
+          <a:lstStyle/>
           <a:p>
             <a:pPr algn="l" marL="342900" indent="-342900">
               <a:lnSpc>
@@ -3701,7 +3771,7 @@
                 <a:ea typeface="Georgia" pitchFamily="34" charset="-122"/>
                 <a:cs typeface="Georgia" pitchFamily="34" charset="-120"/>
               </a:rPr>
-              <a:t>Introduce the Sanskrit term.</a:t>
+              <a:t>Demonstrate on 3×3.</a:t>
             </a:r>
             <a:pPr algn="l" indent="0" marL="0">
               <a:lnSpc>
@@ -3721,10 +3791,259 @@
                 <a:ea typeface="Georgia" pitchFamily="34" charset="-122"/>
                 <a:cs typeface="Georgia" pitchFamily="34" charset="-120"/>
               </a:rPr>
-              <a:t> Once, in the triple format, then italicised only.</a:t>
+              <a:t> Place 1 top-middle. Move up-right (wraps to bottom row, same column shift) → 2 goes bottom-right. Continue:</a:t>
             </a:r>
             <a:endParaRPr lang="en-US" sz="1200" dirty="0"/>
           </a:p>
+        </p:txBody>
+      </p:sp>
+      <p:sp>
+        <p:nvSpPr>
+          <p:cNvPr id="7" name="Text 5"/>
+          <p:cNvSpPr/>
+          <p:nvPr/>
+        </p:nvSpPr>
+        <p:spPr>
+          <a:xfrm>
+            <a:off x="406301" y="2785318"/>
+            <a:ext cx="8331398" cy="777627"/>
+          </a:xfrm>
+          <a:prstGeom prst="rect">
+            <a:avLst/>
+          </a:prstGeom>
+          <a:solidFill>
+            <a:srgbClr val="FFFFFF"/>
+          </a:solidFill>
+          <a:ln/>
+        </p:spPr>
+        <p:txBody>
+          <a:bodyPr wrap="square" rtlCol="0" anchor="ctr"/>
+          <a:lstStyle/>
+          <a:p>
+            <a:pPr indent="0" marL="0">
+              <a:buNone/>
+            </a:pPr>
+            <a:endParaRPr lang="en-US" dirty="0"/>
+          </a:p>
+        </p:txBody>
+      </p:sp>
+      <p:sp>
+        <p:nvSpPr>
+          <p:cNvPr id="8" name="Shape 6"/>
+          <p:cNvSpPr/>
+          <p:nvPr/>
+        </p:nvSpPr>
+        <p:spPr>
+          <a:xfrm>
+            <a:off x="430113" y="2785318"/>
+            <a:ext cx="0" cy="777627"/>
+          </a:xfrm>
+          <a:prstGeom prst="line">
+            <a:avLst/>
+          </a:prstGeom>
+          <a:noFill/>
+          <a:ln w="47625">
+            <a:solidFill>
+              <a:srgbClr val="5D1D2E"/>
+            </a:solidFill>
+            <a:prstDash val="solid"/>
+          </a:ln>
+        </p:spPr>
+      </p:sp>
+      <p:sp>
+        <p:nvSpPr>
+          <p:cNvPr id="9" name="Text 7"/>
+          <p:cNvSpPr/>
+          <p:nvPr/>
+        </p:nvSpPr>
+        <p:spPr>
+          <a:xfrm>
+            <a:off x="631627" y="2912269"/>
+            <a:ext cx="8086939" cy="174575"/>
+          </a:xfrm>
+          <a:prstGeom prst="rect">
+            <a:avLst/>
+          </a:prstGeom>
+          <a:noFill/>
+          <a:ln/>
+        </p:spPr>
+        <p:txBody>
+          <a:bodyPr wrap="square" lIns="0" tIns="0" rIns="0" bIns="0" rtlCol="0" anchor="t"/>
+          <a:lstStyle/>
+          <a:p>
+            <a:pPr algn="l" indent="0" marL="0">
+              <a:lnSpc>
+                <a:spcPts val="1375"/>
+              </a:lnSpc>
+              <a:buNone/>
+            </a:pPr>
+            <a:r>
+              <a:rPr lang="en-US" sz="1100" dirty="0">
+                <a:solidFill>
+                  <a:srgbClr val="1A1A1A"/>
+                </a:solidFill>
+                <a:latin typeface="Courier New" pitchFamily="34" charset="0"/>
+                <a:ea typeface="Courier New" pitchFamily="34" charset="-122"/>
+                <a:cs typeface="Courier New" pitchFamily="34" charset="-120"/>
+              </a:rPr>
+              <a:t>8 1 6</a:t>
+            </a:r>
+            <a:endParaRPr lang="en-US" sz="1100" dirty="0"/>
+          </a:p>
+        </p:txBody>
+      </p:sp>
+      <p:sp>
+        <p:nvSpPr>
+          <p:cNvPr id="10" name="Text 8"/>
+          <p:cNvSpPr/>
+          <p:nvPr/>
+        </p:nvSpPr>
+        <p:spPr>
+          <a:xfrm>
+            <a:off x="631627" y="3086844"/>
+            <a:ext cx="8086939" cy="174575"/>
+          </a:xfrm>
+          <a:prstGeom prst="rect">
+            <a:avLst/>
+          </a:prstGeom>
+          <a:noFill/>
+          <a:ln/>
+        </p:spPr>
+        <p:txBody>
+          <a:bodyPr wrap="square" lIns="0" tIns="0" rIns="0" bIns="0" rtlCol="0" anchor="t"/>
+          <a:lstStyle/>
+          <a:p>
+            <a:pPr algn="l" indent="0" marL="0">
+              <a:lnSpc>
+                <a:spcPts val="1375"/>
+              </a:lnSpc>
+              <a:buNone/>
+            </a:pPr>
+            <a:r>
+              <a:rPr lang="en-US" sz="1100" dirty="0">
+                <a:solidFill>
+                  <a:srgbClr val="1A1A1A"/>
+                </a:solidFill>
+                <a:latin typeface="Courier New" pitchFamily="34" charset="0"/>
+                <a:ea typeface="Courier New" pitchFamily="34" charset="-122"/>
+                <a:cs typeface="Courier New" pitchFamily="34" charset="-120"/>
+              </a:rPr>
+              <a:t>3 5 7</a:t>
+            </a:r>
+            <a:endParaRPr lang="en-US" sz="1100" dirty="0"/>
+          </a:p>
+        </p:txBody>
+      </p:sp>
+      <p:sp>
+        <p:nvSpPr>
+          <p:cNvPr id="11" name="Text 9"/>
+          <p:cNvSpPr/>
+          <p:nvPr/>
+        </p:nvSpPr>
+        <p:spPr>
+          <a:xfrm>
+            <a:off x="631627" y="3261420"/>
+            <a:ext cx="8086939" cy="174575"/>
+          </a:xfrm>
+          <a:prstGeom prst="rect">
+            <a:avLst/>
+          </a:prstGeom>
+          <a:noFill/>
+          <a:ln/>
+        </p:spPr>
+        <p:txBody>
+          <a:bodyPr wrap="square" lIns="0" tIns="0" rIns="0" bIns="0" rtlCol="0" anchor="t"/>
+          <a:lstStyle/>
+          <a:p>
+            <a:pPr algn="l" indent="0" marL="0">
+              <a:lnSpc>
+                <a:spcPts val="1375"/>
+              </a:lnSpc>
+              <a:buNone/>
+            </a:pPr>
+            <a:r>
+              <a:rPr lang="en-US" sz="1100" dirty="0">
+                <a:solidFill>
+                  <a:srgbClr val="1A1A1A"/>
+                </a:solidFill>
+                <a:latin typeface="Courier New" pitchFamily="34" charset="0"/>
+                <a:ea typeface="Courier New" pitchFamily="34" charset="-122"/>
+                <a:cs typeface="Courier New" pitchFamily="34" charset="-120"/>
+              </a:rPr>
+              <a:t>4 9 2</a:t>
+            </a:r>
+            <a:endParaRPr lang="en-US" sz="1100" dirty="0"/>
+          </a:p>
+        </p:txBody>
+      </p:sp>
+      <p:sp>
+        <p:nvSpPr>
+          <p:cNvPr id="12" name="Text 10"/>
+          <p:cNvSpPr/>
+          <p:nvPr/>
+        </p:nvSpPr>
+        <p:spPr>
+          <a:xfrm>
+            <a:off x="406301" y="3651796"/>
+            <a:ext cx="8498026" cy="426541"/>
+          </a:xfrm>
+          <a:prstGeom prst="rect">
+            <a:avLst/>
+          </a:prstGeom>
+          <a:noFill/>
+          <a:ln/>
+        </p:spPr>
+        <p:txBody>
+          <a:bodyPr wrap="square" lIns="0" tIns="0" rIns="0" bIns="0" rtlCol="0" anchor="t"/>
+          <a:lstStyle/>
+          <a:p>
+            <a:pPr algn="l" indent="0" marL="0">
+              <a:lnSpc>
+                <a:spcPts val="1680"/>
+              </a:lnSpc>
+              <a:spcBef>
+                <a:spcPts val="300"/>
+              </a:spcBef>
+              <a:spcAft>
+                <a:spcPts val="300"/>
+              </a:spcAft>
+              <a:buNone/>
+            </a:pPr>
+            <a:r>
+              <a:rPr lang="en-US" sz="1200" dirty="0">
+                <a:solidFill>
+                  <a:srgbClr val="1A1A1A"/>
+                </a:solidFill>
+                <a:latin typeface="Georgia" pitchFamily="34" charset="0"/>
+                <a:ea typeface="Georgia" pitchFamily="34" charset="-122"/>
+                <a:cs typeface="Georgia" pitchFamily="34" charset="-120"/>
+              </a:rPr>
+              <a:t>Verify: rows, columns, diagonals all = 15. ✓ (Note: this is a different symmetric variant of the 3×3 magic square than yesterday's.)</a:t>
+            </a:r>
+            <a:endParaRPr lang="en-US" sz="1200" dirty="0"/>
+          </a:p>
+        </p:txBody>
+      </p:sp>
+      <p:sp>
+        <p:nvSpPr>
+          <p:cNvPr id="13" name="Text 11"/>
+          <p:cNvSpPr/>
+          <p:nvPr/>
+        </p:nvSpPr>
+        <p:spPr>
+          <a:xfrm>
+            <a:off x="634901" y="4167188"/>
+            <a:ext cx="8102798" cy="487561"/>
+          </a:xfrm>
+          <a:prstGeom prst="rect">
+            <a:avLst/>
+          </a:prstGeom>
+          <a:noFill/>
+          <a:ln/>
+        </p:spPr>
+        <p:txBody>
+          <a:bodyPr wrap="square" lIns="0" tIns="0" rIns="0" bIns="0" rtlCol="0" anchor="t"/>
+          <a:lstStyle/>
           <a:p>
             <a:pPr algn="l" marL="342900" indent="-342900">
               <a:lnSpc>
@@ -3745,7 +4064,7 @@
                 <a:ea typeface="Georgia" pitchFamily="34" charset="-122"/>
                 <a:cs typeface="Georgia" pitchFamily="34" charset="-120"/>
               </a:rPr>
-              <a:t>Build the conceptual map.</a:t>
+              <a:t>Source.</a:t>
             </a:r>
             <a:pPr algn="l" indent="0" marL="0">
               <a:lnSpc>
@@ -3765,10 +4084,152 @@
                 <a:ea typeface="Georgia" pitchFamily="34" charset="-122"/>
                 <a:cs typeface="Georgia" pitchFamily="34" charset="-120"/>
               </a:rPr>
-              <a:t> Connect today's idea to prior modules (especially Module 2 if applicable) and prior days.</a:t>
+              <a:t> Nārāyaṇa Paṇḍita's </a:t>
+            </a:r>
+            <a:pPr algn="l" indent="0" marL="0">
+              <a:lnSpc>
+                <a:spcPts val="1620"/>
+              </a:lnSpc>
+              <a:spcAft>
+                <a:spcPts val="300"/>
+              </a:spcAft>
+              <a:buNone/>
+            </a:pPr>
+            <a:r>
+              <a:rPr lang="en-US" sz="1200" i="1" dirty="0">
+                <a:solidFill>
+                  <a:srgbClr val="1A1A1A"/>
+                </a:solidFill>
+                <a:latin typeface="Georgia" pitchFamily="34" charset="0"/>
+                <a:ea typeface="Georgia" pitchFamily="34" charset="-122"/>
+                <a:cs typeface="Georgia" pitchFamily="34" charset="-120"/>
+              </a:rPr>
+              <a:t>Gaṇita-kaumudī</a:t>
+            </a:r>
+            <a:pPr algn="l" indent="0" marL="0">
+              <a:lnSpc>
+                <a:spcPts val="1620"/>
+              </a:lnSpc>
+              <a:spcAft>
+                <a:spcPts val="300"/>
+              </a:spcAft>
+              <a:buNone/>
+            </a:pPr>
+            <a:r>
+              <a:rPr lang="en-US" sz="1200" dirty="0">
+                <a:solidFill>
+                  <a:srgbClr val="1A1A1A"/>
+                </a:solidFill>
+                <a:latin typeface="Georgia" pitchFamily="34" charset="0"/>
+                <a:ea typeface="Georgia" pitchFamily="34" charset="-122"/>
+                <a:cs typeface="Georgia" pitchFamily="34" charset="-120"/>
+              </a:rPr>
+              <a:t> (1356 CE), Book 14 (</a:t>
+            </a:r>
+            <a:pPr algn="l" indent="0" marL="0">
+              <a:lnSpc>
+                <a:spcPts val="1620"/>
+              </a:lnSpc>
+              <a:spcAft>
+                <a:spcPts val="300"/>
+              </a:spcAft>
+              <a:buNone/>
+            </a:pPr>
+            <a:r>
+              <a:rPr lang="en-US" sz="1200" i="1" dirty="0">
+                <a:solidFill>
+                  <a:srgbClr val="1A1A1A"/>
+                </a:solidFill>
+                <a:latin typeface="Georgia" pitchFamily="34" charset="0"/>
+                <a:ea typeface="Georgia" pitchFamily="34" charset="-122"/>
+                <a:cs typeface="Georgia" pitchFamily="34" charset="-120"/>
+              </a:rPr>
+              <a:t>Bhadra-gaṇita</a:t>
+            </a:r>
+            <a:pPr algn="l" indent="0" marL="0">
+              <a:lnSpc>
+                <a:spcPts val="1620"/>
+              </a:lnSpc>
+              <a:spcAft>
+                <a:spcPts val="300"/>
+              </a:spcAft>
+              <a:buNone/>
+            </a:pPr>
+            <a:r>
+              <a:rPr lang="en-US" sz="1200" dirty="0">
+                <a:solidFill>
+                  <a:srgbClr val="1A1A1A"/>
+                </a:solidFill>
+                <a:latin typeface="Georgia" pitchFamily="34" charset="0"/>
+                <a:ea typeface="Georgia" pitchFamily="34" charset="-122"/>
+                <a:cs typeface="Georgia" pitchFamily="34" charset="-120"/>
+              </a:rPr>
+              <a:t>). He calls this method </a:t>
+            </a:r>
+            <a:pPr algn="l" indent="0" marL="0">
+              <a:lnSpc>
+                <a:spcPts val="1620"/>
+              </a:lnSpc>
+              <a:spcAft>
+                <a:spcPts val="300"/>
+              </a:spcAft>
+              <a:buNone/>
+            </a:pPr>
+            <a:r>
+              <a:rPr lang="en-US" sz="1200" i="1" dirty="0">
+                <a:solidFill>
+                  <a:srgbClr val="1A1A1A"/>
+                </a:solidFill>
+                <a:latin typeface="Georgia" pitchFamily="34" charset="0"/>
+                <a:ea typeface="Georgia" pitchFamily="34" charset="-122"/>
+                <a:cs typeface="Georgia" pitchFamily="34" charset="-120"/>
+              </a:rPr>
+              <a:t>turagagati</a:t>
+            </a:r>
+            <a:pPr algn="l" indent="0" marL="0">
+              <a:lnSpc>
+                <a:spcPts val="1620"/>
+              </a:lnSpc>
+              <a:spcAft>
+                <a:spcPts val="300"/>
+              </a:spcAft>
+              <a:buNone/>
+            </a:pPr>
+            <a:r>
+              <a:rPr lang="en-US" sz="1200" dirty="0">
+                <a:solidFill>
+                  <a:srgbClr val="1A1A1A"/>
+                </a:solidFill>
+                <a:latin typeface="Georgia" pitchFamily="34" charset="0"/>
+                <a:ea typeface="Georgia" pitchFamily="34" charset="-122"/>
+                <a:cs typeface="Georgia" pitchFamily="34" charset="-120"/>
+              </a:rPr>
+              <a:t> — "horse-step" (knight-like move).</a:t>
             </a:r>
             <a:endParaRPr lang="en-US" sz="1200" dirty="0"/>
           </a:p>
+        </p:txBody>
+      </p:sp>
+      <p:sp>
+        <p:nvSpPr>
+          <p:cNvPr id="14" name="Text 12"/>
+          <p:cNvSpPr/>
+          <p:nvPr/>
+        </p:nvSpPr>
+        <p:spPr>
+          <a:xfrm>
+            <a:off x="634901" y="4756249"/>
+            <a:ext cx="8102798" cy="487561"/>
+          </a:xfrm>
+          <a:prstGeom prst="rect">
+            <a:avLst/>
+          </a:prstGeom>
+          <a:noFill/>
+          <a:ln/>
+        </p:spPr>
+        <p:txBody>
+          <a:bodyPr wrap="square" lIns="0" tIns="0" rIns="0" bIns="0" rtlCol="0" anchor="t"/>
+          <a:lstStyle/>
           <a:p>
             <a:pPr algn="l" marL="342900" indent="-342900">
               <a:lnSpc>
@@ -3789,7 +4250,7 @@
                 <a:ea typeface="Georgia" pitchFamily="34" charset="-122"/>
                 <a:cs typeface="Georgia" pitchFamily="34" charset="-120"/>
               </a:rPr>
-              <a:t>Work an example</a:t>
+              <a:t>Cross-cultural.</a:t>
             </a:r>
             <a:pPr algn="l" indent="0" marL="0">
               <a:lnSpc>
@@ -3809,10 +4270,32 @@
                 <a:ea typeface="Georgia" pitchFamily="34" charset="-122"/>
                 <a:cs typeface="Georgia" pitchFamily="34" charset="-120"/>
               </a:rPr>
-              <a:t> with the whole class on the board.</a:t>
+              <a:t> The same method was independently discovered or transmitted in Arabic and European mathematics. The earliest extant Indian description is Nārāyaṇa's.</a:t>
             </a:r>
             <a:endParaRPr lang="en-US" sz="1200" dirty="0"/>
           </a:p>
+        </p:txBody>
+      </p:sp>
+      <p:sp>
+        <p:nvSpPr>
+          <p:cNvPr id="15" name="Text 13"/>
+          <p:cNvSpPr/>
+          <p:nvPr/>
+        </p:nvSpPr>
+        <p:spPr>
+          <a:xfrm>
+            <a:off x="634901" y="5345311"/>
+            <a:ext cx="8102798" cy="487561"/>
+          </a:xfrm>
+          <a:prstGeom prst="rect">
+            <a:avLst/>
+          </a:prstGeom>
+          <a:noFill/>
+          <a:ln/>
+        </p:spPr>
+        <p:txBody>
+          <a:bodyPr wrap="square" lIns="0" tIns="0" rIns="0" bIns="0" rtlCol="0" anchor="t"/>
+          <a:lstStyle/>
           <a:p>
             <a:pPr algn="l" marL="342900" indent="-342900">
               <a:lnSpc>
@@ -3833,7 +4316,7 @@
                 <a:ea typeface="Georgia" pitchFamily="34" charset="-122"/>
                 <a:cs typeface="Georgia" pitchFamily="34" charset="-120"/>
               </a:rPr>
-              <a:t>Independent or paired practice</a:t>
+              <a:t>Try on your own.</a:t>
             </a:r>
             <a:pPr algn="l" indent="0" marL="0">
               <a:lnSpc>
@@ -3853,7 +4336,7 @@
                 <a:ea typeface="Georgia" pitchFamily="34" charset="-122"/>
                 <a:cs typeface="Georgia" pitchFamily="34" charset="-120"/>
               </a:rPr>
-              <a:t> for ~5 minutes.</a:t>
+              <a:t> Each student applies the algorithm to construct another 3×3 magic square. Tomorrow we extend to 5×5.</a:t>
             </a:r>
             <a:endParaRPr lang="en-US" sz="1200" dirty="0"/>
           </a:p>
@@ -3861,13 +4344,13 @@
       </p:sp>
       <p:sp>
         <p:nvSpPr>
-          <p:cNvPr id="5" name="Text 3"/>
-          <p:cNvSpPr/>
-          <p:nvPr/>
-        </p:nvSpPr>
-        <p:spPr>
-          <a:xfrm>
-            <a:off x="406301" y="4434929"/>
+          <p:cNvPr id="16" name="Text 14"/>
+          <p:cNvSpPr/>
+          <p:nvPr/>
+        </p:nvSpPr>
+        <p:spPr>
+          <a:xfrm>
+            <a:off x="406301" y="5997922"/>
             <a:ext cx="8498026" cy="213271"/>
           </a:xfrm>
           <a:prstGeom prst="rect">

--- a/exports/pptx/lessons/senior-module-14-magic-squares/day-04-stair-step-method.pptx
+++ b/exports/pptx/lessons/senior-module-14-magic-squares/day-04-stair-step-method.pptx
@@ -16,9 +16,13 @@
     <p:sldId id="264" r:id="rId10"/>
     <p:sldId id="265" r:id="rId11"/>
     <p:sldId id="266" r:id="rId12"/>
+    <p:sldId id="267" r:id="rId13"/>
+    <p:sldId id="268" r:id="rId14"/>
+    <p:sldId id="269" r:id="rId15"/>
+    <p:sldId id="270" r:id="rId16"/>
   </p:sldIdLst>
   <p:notesMasterIdLst>
-    <p:notesMasterId r:id="rId13"/>
+    <p:notesMasterId r:id="rId17"/>
   </p:notesMasterIdLst>
   <p:sldSz cx="9144000" cy="5143500"/>
   <p:notesSz cx="5143500" cy="9144000"/>
@@ -712,6 +716,358 @@
             <a:fld id="{F7021451-1387-4CA6-816F-3879F97B5CBC}" type="slidenum">
               <a:rPr lang="en-US"/>
               <a:t>11</a:t>
+            </a:fld>
+            <a:endParaRPr lang="en-US"/>
+          </a:p>
+        </p:txBody>
+      </p:sp>
+    </p:spTree>
+    <p:extLst>
+      <p:ext uri="{BB962C8B-B14F-4D97-AF65-F5344CB8AC3E}">
+        <p14:creationId xmlns:p14="http://schemas.microsoft.com/office/powerpoint/2010/main" val="1024086991"/>
+      </p:ext>
+    </p:extLst>
+  </p:cSld>
+  <p:clrMapOvr>
+    <a:masterClrMapping/>
+  </p:clrMapOvr>
+</p:notes>
+</file>
+
+<file path=ppt/notesSlides/notesSlide12.xml><?xml version="1.0" encoding="utf-8"?>
+<p:notes xmlns:a="http://schemas.openxmlformats.org/drawingml/2006/main" xmlns:r="http://schemas.openxmlformats.org/officeDocument/2006/relationships" xmlns:p="http://schemas.openxmlformats.org/presentationml/2006/main">
+  <p:cSld>
+    <p:spTree>
+      <p:nvGrpSpPr>
+        <p:cNvPr id="1" name=""/>
+        <p:cNvGrpSpPr/>
+        <p:nvPr/>
+      </p:nvGrpSpPr>
+      <p:grpSpPr>
+        <a:xfrm>
+          <a:off x="0" y="0"/>
+          <a:ext cx="0" cy="0"/>
+          <a:chOff x="0" y="0"/>
+          <a:chExt cx="0" cy="0"/>
+        </a:xfrm>
+      </p:grpSpPr>
+      <p:sp>
+        <p:nvSpPr>
+          <p:cNvPr id="2" name="Slide Image Placeholder 1"/>
+          <p:cNvSpPr>
+            <a:spLocks noGrp="1" noRot="1" noChangeAspect="1"/>
+          </p:cNvSpPr>
+          <p:nvPr>
+            <p:ph type="sldImg"/>
+          </p:nvPr>
+        </p:nvSpPr>
+        <p:spPr/>
+      </p:sp>
+      <p:sp>
+        <p:nvSpPr>
+          <p:cNvPr id="3" name="Notes Placeholder 2"/>
+          <p:cNvSpPr>
+            <a:spLocks noGrp="1"/>
+          </p:cNvSpPr>
+          <p:nvPr>
+            <p:ph type="body" idx="1"/>
+          </p:nvPr>
+        </p:nvSpPr>
+        <p:spPr/>
+        <p:txBody>
+          <a:bodyPr/>
+          <a:lstStyle/>
+          <a:p>
+            <a:r>
+              <a:rPr lang="en-US" dirty="0"/>
+              <a:t/>
+            </a:r>
+            <a:endParaRPr lang="en-US" dirty="0"/>
+          </a:p>
+        </p:txBody>
+      </p:sp>
+      <p:sp>
+        <p:nvSpPr>
+          <p:cNvPr id="4" name="Slide Number Placeholder 3"/>
+          <p:cNvSpPr>
+            <a:spLocks noGrp="1"/>
+          </p:cNvSpPr>
+          <p:nvPr>
+            <p:ph type="sldNum" sz="quarter" idx="10"/>
+          </p:nvPr>
+        </p:nvSpPr>
+        <p:spPr/>
+        <p:txBody>
+          <a:bodyPr/>
+          <a:lstStyle/>
+          <a:p>
+            <a:fld id="{F7021451-1387-4CA6-816F-3879F97B5CBC}" type="slidenum">
+              <a:rPr lang="en-US"/>
+              <a:t>12</a:t>
+            </a:fld>
+            <a:endParaRPr lang="en-US"/>
+          </a:p>
+        </p:txBody>
+      </p:sp>
+    </p:spTree>
+    <p:extLst>
+      <p:ext uri="{BB962C8B-B14F-4D97-AF65-F5344CB8AC3E}">
+        <p14:creationId xmlns:p14="http://schemas.microsoft.com/office/powerpoint/2010/main" val="1024086991"/>
+      </p:ext>
+    </p:extLst>
+  </p:cSld>
+  <p:clrMapOvr>
+    <a:masterClrMapping/>
+  </p:clrMapOvr>
+</p:notes>
+</file>
+
+<file path=ppt/notesSlides/notesSlide13.xml><?xml version="1.0" encoding="utf-8"?>
+<p:notes xmlns:a="http://schemas.openxmlformats.org/drawingml/2006/main" xmlns:r="http://schemas.openxmlformats.org/officeDocument/2006/relationships" xmlns:p="http://schemas.openxmlformats.org/presentationml/2006/main">
+  <p:cSld>
+    <p:spTree>
+      <p:nvGrpSpPr>
+        <p:cNvPr id="1" name=""/>
+        <p:cNvGrpSpPr/>
+        <p:nvPr/>
+      </p:nvGrpSpPr>
+      <p:grpSpPr>
+        <a:xfrm>
+          <a:off x="0" y="0"/>
+          <a:ext cx="0" cy="0"/>
+          <a:chOff x="0" y="0"/>
+          <a:chExt cx="0" cy="0"/>
+        </a:xfrm>
+      </p:grpSpPr>
+      <p:sp>
+        <p:nvSpPr>
+          <p:cNvPr id="2" name="Slide Image Placeholder 1"/>
+          <p:cNvSpPr>
+            <a:spLocks noGrp="1" noRot="1" noChangeAspect="1"/>
+          </p:cNvSpPr>
+          <p:nvPr>
+            <p:ph type="sldImg"/>
+          </p:nvPr>
+        </p:nvSpPr>
+        <p:spPr/>
+      </p:sp>
+      <p:sp>
+        <p:nvSpPr>
+          <p:cNvPr id="3" name="Notes Placeholder 2"/>
+          <p:cNvSpPr>
+            <a:spLocks noGrp="1"/>
+          </p:cNvSpPr>
+          <p:nvPr>
+            <p:ph type="body" idx="1"/>
+          </p:nvPr>
+        </p:nvSpPr>
+        <p:spPr/>
+        <p:txBody>
+          <a:bodyPr/>
+          <a:lstStyle/>
+          <a:p>
+            <a:r>
+              <a:rPr lang="en-US" dirty="0"/>
+              <a:t/>
+            </a:r>
+            <a:endParaRPr lang="en-US" dirty="0"/>
+          </a:p>
+        </p:txBody>
+      </p:sp>
+      <p:sp>
+        <p:nvSpPr>
+          <p:cNvPr id="4" name="Slide Number Placeholder 3"/>
+          <p:cNvSpPr>
+            <a:spLocks noGrp="1"/>
+          </p:cNvSpPr>
+          <p:nvPr>
+            <p:ph type="sldNum" sz="quarter" idx="10"/>
+          </p:nvPr>
+        </p:nvSpPr>
+        <p:spPr/>
+        <p:txBody>
+          <a:bodyPr/>
+          <a:lstStyle/>
+          <a:p>
+            <a:fld id="{F7021451-1387-4CA6-816F-3879F97B5CBC}" type="slidenum">
+              <a:rPr lang="en-US"/>
+              <a:t>13</a:t>
+            </a:fld>
+            <a:endParaRPr lang="en-US"/>
+          </a:p>
+        </p:txBody>
+      </p:sp>
+    </p:spTree>
+    <p:extLst>
+      <p:ext uri="{BB962C8B-B14F-4D97-AF65-F5344CB8AC3E}">
+        <p14:creationId xmlns:p14="http://schemas.microsoft.com/office/powerpoint/2010/main" val="1024086991"/>
+      </p:ext>
+    </p:extLst>
+  </p:cSld>
+  <p:clrMapOvr>
+    <a:masterClrMapping/>
+  </p:clrMapOvr>
+</p:notes>
+</file>
+
+<file path=ppt/notesSlides/notesSlide14.xml><?xml version="1.0" encoding="utf-8"?>
+<p:notes xmlns:a="http://schemas.openxmlformats.org/drawingml/2006/main" xmlns:r="http://schemas.openxmlformats.org/officeDocument/2006/relationships" xmlns:p="http://schemas.openxmlformats.org/presentationml/2006/main">
+  <p:cSld>
+    <p:spTree>
+      <p:nvGrpSpPr>
+        <p:cNvPr id="1" name=""/>
+        <p:cNvGrpSpPr/>
+        <p:nvPr/>
+      </p:nvGrpSpPr>
+      <p:grpSpPr>
+        <a:xfrm>
+          <a:off x="0" y="0"/>
+          <a:ext cx="0" cy="0"/>
+          <a:chOff x="0" y="0"/>
+          <a:chExt cx="0" cy="0"/>
+        </a:xfrm>
+      </p:grpSpPr>
+      <p:sp>
+        <p:nvSpPr>
+          <p:cNvPr id="2" name="Slide Image Placeholder 1"/>
+          <p:cNvSpPr>
+            <a:spLocks noGrp="1" noRot="1" noChangeAspect="1"/>
+          </p:cNvSpPr>
+          <p:nvPr>
+            <p:ph type="sldImg"/>
+          </p:nvPr>
+        </p:nvSpPr>
+        <p:spPr/>
+      </p:sp>
+      <p:sp>
+        <p:nvSpPr>
+          <p:cNvPr id="3" name="Notes Placeholder 2"/>
+          <p:cNvSpPr>
+            <a:spLocks noGrp="1"/>
+          </p:cNvSpPr>
+          <p:nvPr>
+            <p:ph type="body" idx="1"/>
+          </p:nvPr>
+        </p:nvSpPr>
+        <p:spPr/>
+        <p:txBody>
+          <a:bodyPr/>
+          <a:lstStyle/>
+          <a:p>
+            <a:r>
+              <a:rPr lang="en-US" dirty="0"/>
+              <a:t/>
+            </a:r>
+            <a:endParaRPr lang="en-US" dirty="0"/>
+          </a:p>
+        </p:txBody>
+      </p:sp>
+      <p:sp>
+        <p:nvSpPr>
+          <p:cNvPr id="4" name="Slide Number Placeholder 3"/>
+          <p:cNvSpPr>
+            <a:spLocks noGrp="1"/>
+          </p:cNvSpPr>
+          <p:nvPr>
+            <p:ph type="sldNum" sz="quarter" idx="10"/>
+          </p:nvPr>
+        </p:nvSpPr>
+        <p:spPr/>
+        <p:txBody>
+          <a:bodyPr/>
+          <a:lstStyle/>
+          <a:p>
+            <a:fld id="{F7021451-1387-4CA6-816F-3879F97B5CBC}" type="slidenum">
+              <a:rPr lang="en-US"/>
+              <a:t>14</a:t>
+            </a:fld>
+            <a:endParaRPr lang="en-US"/>
+          </a:p>
+        </p:txBody>
+      </p:sp>
+    </p:spTree>
+    <p:extLst>
+      <p:ext uri="{BB962C8B-B14F-4D97-AF65-F5344CB8AC3E}">
+        <p14:creationId xmlns:p14="http://schemas.microsoft.com/office/powerpoint/2010/main" val="1024086991"/>
+      </p:ext>
+    </p:extLst>
+  </p:cSld>
+  <p:clrMapOvr>
+    <a:masterClrMapping/>
+  </p:clrMapOvr>
+</p:notes>
+</file>
+
+<file path=ppt/notesSlides/notesSlide15.xml><?xml version="1.0" encoding="utf-8"?>
+<p:notes xmlns:a="http://schemas.openxmlformats.org/drawingml/2006/main" xmlns:r="http://schemas.openxmlformats.org/officeDocument/2006/relationships" xmlns:p="http://schemas.openxmlformats.org/presentationml/2006/main">
+  <p:cSld>
+    <p:spTree>
+      <p:nvGrpSpPr>
+        <p:cNvPr id="1" name=""/>
+        <p:cNvGrpSpPr/>
+        <p:nvPr/>
+      </p:nvGrpSpPr>
+      <p:grpSpPr>
+        <a:xfrm>
+          <a:off x="0" y="0"/>
+          <a:ext cx="0" cy="0"/>
+          <a:chOff x="0" y="0"/>
+          <a:chExt cx="0" cy="0"/>
+        </a:xfrm>
+      </p:grpSpPr>
+      <p:sp>
+        <p:nvSpPr>
+          <p:cNvPr id="2" name="Slide Image Placeholder 1"/>
+          <p:cNvSpPr>
+            <a:spLocks noGrp="1" noRot="1" noChangeAspect="1"/>
+          </p:cNvSpPr>
+          <p:nvPr>
+            <p:ph type="sldImg"/>
+          </p:nvPr>
+        </p:nvSpPr>
+        <p:spPr/>
+      </p:sp>
+      <p:sp>
+        <p:nvSpPr>
+          <p:cNvPr id="3" name="Notes Placeholder 2"/>
+          <p:cNvSpPr>
+            <a:spLocks noGrp="1"/>
+          </p:cNvSpPr>
+          <p:nvPr>
+            <p:ph type="body" idx="1"/>
+          </p:nvPr>
+        </p:nvSpPr>
+        <p:spPr/>
+        <p:txBody>
+          <a:bodyPr/>
+          <a:lstStyle/>
+          <a:p>
+            <a:r>
+              <a:rPr lang="en-US" dirty="0"/>
+              <a:t/>
+            </a:r>
+            <a:endParaRPr lang="en-US" dirty="0"/>
+          </a:p>
+        </p:txBody>
+      </p:sp>
+      <p:sp>
+        <p:nvSpPr>
+          <p:cNvPr id="4" name="Slide Number Placeholder 3"/>
+          <p:cNvSpPr>
+            <a:spLocks noGrp="1"/>
+          </p:cNvSpPr>
+          <p:nvPr>
+            <p:ph type="sldNum" sz="quarter" idx="10"/>
+          </p:nvPr>
+        </p:nvSpPr>
+        <p:spPr/>
+        <p:txBody>
+          <a:bodyPr/>
+          <a:lstStyle/>
+          <a:p>
+            <a:fld id="{F7021451-1387-4CA6-816F-3879F97B5CBC}" type="slidenum">
+              <a:rPr lang="en-US"/>
+              <a:t>15</a:t>
             </a:fld>
             <a:endParaRPr lang="en-US"/>
           </a:p>
@@ -2011,102 +2367,6 @@
         </p:nvSpPr>
         <p:spPr>
           <a:xfrm>
-            <a:off x="406301" y="1223963"/>
-            <a:ext cx="8498026" cy="274290"/>
-          </a:xfrm>
-          <a:prstGeom prst="rect">
-            <a:avLst/>
-          </a:prstGeom>
-          <a:noFill/>
-          <a:ln/>
-        </p:spPr>
-        <p:txBody>
-          <a:bodyPr wrap="square" lIns="0" tIns="0" rIns="0" bIns="0" rtlCol="0" anchor="t"/>
-          <a:lstStyle/>
-          <a:p>
-            <a:pPr algn="l" indent="0" marL="0">
-              <a:lnSpc>
-                <a:spcPts val="2160"/>
-              </a:lnSpc>
-              <a:spcBef>
-                <a:spcPts val="600"/>
-              </a:spcBef>
-              <a:spcAft>
-                <a:spcPts val="800"/>
-              </a:spcAft>
-              <a:buNone/>
-            </a:pPr>
-            <a:r>
-              <a:rPr lang="en-US" sz="1800" b="1" dirty="0">
-                <a:solidFill>
-                  <a:srgbClr val="997929"/>
-                </a:solidFill>
-                <a:latin typeface="Times New Roman" pitchFamily="34" charset="0"/>
-                <a:ea typeface="Times New Roman" pitchFamily="34" charset="-122"/>
-                <a:cs typeface="Times New Roman" pitchFamily="34" charset="-120"/>
-              </a:rPr>
-              <a:t>Learning objective</a:t>
-            </a:r>
-            <a:endParaRPr lang="en-US" sz="1800" dirty="0"/>
-          </a:p>
-        </p:txBody>
-      </p:sp>
-      <p:sp>
-        <p:nvSpPr>
-          <p:cNvPr id="6" name="Text 4"/>
-          <p:cNvSpPr/>
-          <p:nvPr/>
-        </p:nvSpPr>
-        <p:spPr>
-          <a:xfrm>
-            <a:off x="406301" y="1637854"/>
-            <a:ext cx="8498026" cy="213271"/>
-          </a:xfrm>
-          <a:prstGeom prst="rect">
-            <a:avLst/>
-          </a:prstGeom>
-          <a:noFill/>
-          <a:ln/>
-        </p:spPr>
-        <p:txBody>
-          <a:bodyPr wrap="square" lIns="0" tIns="0" rIns="0" bIns="0" rtlCol="0" anchor="t"/>
-          <a:lstStyle/>
-          <a:p>
-            <a:pPr algn="l" indent="0" marL="0">
-              <a:lnSpc>
-                <a:spcPts val="1680"/>
-              </a:lnSpc>
-              <a:spcBef>
-                <a:spcPts val="300"/>
-              </a:spcBef>
-              <a:spcAft>
-                <a:spcPts val="300"/>
-              </a:spcAft>
-              <a:buNone/>
-            </a:pPr>
-            <a:r>
-              <a:rPr lang="en-US" sz="1200" dirty="0">
-                <a:solidFill>
-                  <a:srgbClr val="1A1A1A"/>
-                </a:solidFill>
-                <a:latin typeface="Georgia" pitchFamily="34" charset="0"/>
-                <a:ea typeface="Georgia" pitchFamily="34" charset="-122"/>
-                <a:cs typeface="Georgia" pitchFamily="34" charset="-120"/>
-              </a:rPr>
-              <a:t>By the end of this lesson, students will: apply nārāyaṇa's algorithm to build a 5×5 square.</a:t>
-            </a:r>
-            <a:endParaRPr lang="en-US" sz="1200" dirty="0"/>
-          </a:p>
-        </p:txBody>
-      </p:sp>
-      <p:sp>
-        <p:nvSpPr>
-          <p:cNvPr id="7" name="Text 5"/>
-          <p:cNvSpPr/>
-          <p:nvPr/>
-        </p:nvSpPr>
-        <p:spPr>
-          <a:xfrm>
             <a:off x="406301" y="4434929"/>
             <a:ext cx="8498026" cy="213271"/>
           </a:xfrm>
@@ -2251,7 +2511,7 @@
                 <a:ea typeface="Times New Roman" pitchFamily="34" charset="-122"/>
                 <a:cs typeface="Times New Roman" pitchFamily="34" charset="-120"/>
               </a:rPr>
-              <a:t>Differentiation</a:t>
+              <a:t>Core (20 min) (cont.)</a:t>
             </a:r>
             <a:endParaRPr lang="en-US" sz="1800" dirty="0"/>
           </a:p>
@@ -2266,7 +2526,7 @@
         <p:spPr>
           <a:xfrm>
             <a:off x="634901" y="883593"/>
-            <a:ext cx="8102798" cy="525661"/>
+            <a:ext cx="8102798" cy="487561"/>
           </a:xfrm>
           <a:prstGeom prst="rect">
             <a:avLst/>
@@ -2297,7 +2557,7 @@
                 <a:ea typeface="Georgia" pitchFamily="34" charset="-122"/>
                 <a:cs typeface="Georgia" pitchFamily="34" charset="-120"/>
               </a:rPr>
-              <a:t>Extension:</a:t>
+              <a:t>Cross-cultural.</a:t>
             </a:r>
             <a:pPr algn="l" indent="0" marL="0">
               <a:lnSpc>
@@ -2317,10 +2577,32 @@
                 <a:ea typeface="Georgia" pitchFamily="34" charset="-122"/>
                 <a:cs typeface="Georgia" pitchFamily="34" charset="-120"/>
               </a:rPr>
-              <a:t> offer one open question or extra problem for fast finishers.</a:t>
+              <a:t> The same method was independently discovered or transmitted in Arabic and European mathematics. The earliest extant Indian description is Nārāyaṇa's.</a:t>
             </a:r>
             <a:endParaRPr lang="en-US" sz="1200" dirty="0"/>
           </a:p>
+        </p:txBody>
+      </p:sp>
+      <p:sp>
+        <p:nvSpPr>
+          <p:cNvPr id="5" name="Text 3"/>
+          <p:cNvSpPr/>
+          <p:nvPr/>
+        </p:nvSpPr>
+        <p:spPr>
+          <a:xfrm>
+            <a:off x="634901" y="1472654"/>
+            <a:ext cx="8102798" cy="487561"/>
+          </a:xfrm>
+          <a:prstGeom prst="rect">
+            <a:avLst/>
+          </a:prstGeom>
+          <a:noFill/>
+          <a:ln/>
+        </p:spPr>
+        <p:txBody>
+          <a:bodyPr wrap="square" lIns="0" tIns="0" rIns="0" bIns="0" rtlCol="0" anchor="t"/>
+          <a:lstStyle/>
           <a:p>
             <a:pPr algn="l" marL="342900" indent="-342900">
               <a:lnSpc>
@@ -2341,7 +2623,7 @@
                 <a:ea typeface="Georgia" pitchFamily="34" charset="-122"/>
                 <a:cs typeface="Georgia" pitchFamily="34" charset="-120"/>
               </a:rPr>
-              <a:t>Support:</a:t>
+              <a:t>Try on your own.</a:t>
             </a:r>
             <a:pPr algn="l" indent="0" marL="0">
               <a:lnSpc>
@@ -2361,7 +2643,7 @@
                 <a:ea typeface="Georgia" pitchFamily="34" charset="-122"/>
                 <a:cs typeface="Georgia" pitchFamily="34" charset="-120"/>
               </a:rPr>
-              <a:t> pair students who need scaffolds; offer partial outlines.</a:t>
+              <a:t> Each student applies the algorithm to construct another 3×3 magic square. Tomorrow we extend to 5×5.</a:t>
             </a:r>
             <a:endParaRPr lang="en-US" sz="1200" dirty="0"/>
           </a:p>
@@ -2369,7 +2651,7 @@
       </p:sp>
       <p:sp>
         <p:nvSpPr>
-          <p:cNvPr id="5" name="Text 3"/>
+          <p:cNvPr id="6" name="Text 4"/>
           <p:cNvSpPr/>
           <p:nvPr/>
         </p:nvSpPr>
@@ -2519,7 +2801,7 @@
                 <a:ea typeface="Times New Roman" pitchFamily="34" charset="-122"/>
                 <a:cs typeface="Times New Roman" pitchFamily="34" charset="-120"/>
               </a:rPr>
-              <a:t>Teacher notes</a:t>
+              <a:t>Activity (15 min)</a:t>
             </a:r>
             <a:endParaRPr lang="en-US" sz="1800" dirty="0"/>
           </a:p>
@@ -2534,7 +2816,7 @@
         <p:spPr>
           <a:xfrm>
             <a:off x="406301" y="870942"/>
-            <a:ext cx="8498026" cy="426541"/>
+            <a:ext cx="8498026" cy="436066"/>
           </a:xfrm>
           <a:prstGeom prst="rect">
             <a:avLst/>
@@ -2567,7 +2849,1095 @@
                 <a:ea typeface="Georgia" pitchFamily="34" charset="-122"/>
                 <a:cs typeface="Georgia" pitchFamily="34" charset="-120"/>
               </a:rPr>
-              <a:t>– Citations: at least one quoted verse with citation per module. Day 1 already includes one if applicable; you may add more. – Connect to prior modules where natural (especially Module 2 pañcabhūta).</a:t>
+              <a:t>A scaled version of </a:t>
+            </a:r>
+            <a:pPr algn="l" indent="0" marL="0">
+              <a:lnSpc>
+                <a:spcPts val="1680"/>
+              </a:lnSpc>
+              <a:spcBef>
+                <a:spcPts val="300"/>
+              </a:spcBef>
+              <a:spcAft>
+                <a:spcPts val="300"/>
+              </a:spcAft>
+              <a:buNone/>
+            </a:pPr>
+            <a:r>
+              <a:rPr lang="en-US" sz="1200" i="1" dirty="0">
+                <a:solidFill>
+                  <a:srgbClr val="1A1A1A"/>
+                </a:solidFill>
+                <a:latin typeface="Georgia" pitchFamily="34" charset="0"/>
+                <a:ea typeface="Georgia" pitchFamily="34" charset="-122"/>
+                <a:cs typeface="Georgia" pitchFamily="34" charset="-120"/>
+              </a:rPr>
+              <a:t>Class 3×3 Magic-Square Tournament</a:t>
+            </a:r>
+            <a:pPr algn="l" indent="0" marL="0">
+              <a:lnSpc>
+                <a:spcPts val="1680"/>
+              </a:lnSpc>
+              <a:spcBef>
+                <a:spcPts val="300"/>
+              </a:spcBef>
+              <a:spcAft>
+                <a:spcPts val="300"/>
+              </a:spcAft>
+              <a:buNone/>
+            </a:pPr>
+            <a:r>
+              <a:rPr lang="en-US" sz="1200" dirty="0">
+                <a:solidFill>
+                  <a:srgbClr val="1A1A1A"/>
+                </a:solidFill>
+                <a:latin typeface="Georgia" pitchFamily="34" charset="0"/>
+                <a:ea typeface="Georgia" pitchFamily="34" charset="-122"/>
+                <a:cs typeface="Georgia" pitchFamily="34" charset="-120"/>
+              </a:rPr>
+              <a:t> (see </a:t>
+            </a:r>
+            <a:pPr algn="l" indent="0" marL="0">
+              <a:lnSpc>
+                <a:spcPts val="1680"/>
+              </a:lnSpc>
+              <a:spcBef>
+                <a:spcPts val="300"/>
+              </a:spcBef>
+              <a:spcAft>
+                <a:spcPts val="300"/>
+              </a:spcAft>
+              <a:buNone/>
+            </a:pPr>
+            <a:r>
+              <a:rPr lang="en-US" sz="1200" dirty="0">
+                <a:solidFill>
+                  <a:srgbClr val="1A1A1A"/>
+                </a:solidFill>
+                <a:latin typeface="Georgia" pitchFamily="34" charset="0"/>
+                <a:ea typeface="Georgia" pitchFamily="34" charset="-122"/>
+                <a:cs typeface="Georgia" pitchFamily="34" charset="-120"/>
+              </a:rPr>
+              <a:t>activities/</a:t>
+            </a:r>
+            <a:pPr algn="l" indent="0" marL="0">
+              <a:lnSpc>
+                <a:spcPts val="1680"/>
+              </a:lnSpc>
+              <a:spcBef>
+                <a:spcPts val="300"/>
+              </a:spcBef>
+              <a:spcAft>
+                <a:spcPts val="300"/>
+              </a:spcAft>
+              <a:buNone/>
+            </a:pPr>
+            <a:r>
+              <a:rPr lang="en-US" sz="1200" dirty="0">
+                <a:solidFill>
+                  <a:srgbClr val="1A1A1A"/>
+                </a:solidFill>
+                <a:latin typeface="Georgia" pitchFamily="34" charset="0"/>
+                <a:ea typeface="Georgia" pitchFamily="34" charset="-122"/>
+                <a:cs typeface="Georgia" pitchFamily="34" charset="-120"/>
+              </a:rPr>
+              <a:t>). Today's slice: focus on the part of the activity that reinforces Stair-Step Method (Nārāyaṇa).</a:t>
+            </a:r>
+            <a:endParaRPr lang="en-US" sz="1200" dirty="0"/>
+          </a:p>
+        </p:txBody>
+      </p:sp>
+      <p:sp>
+        <p:nvSpPr>
+          <p:cNvPr id="5" name="Text 3"/>
+          <p:cNvSpPr/>
+          <p:nvPr/>
+        </p:nvSpPr>
+        <p:spPr>
+          <a:xfrm>
+            <a:off x="406301" y="4434929"/>
+            <a:ext cx="8498026" cy="213271"/>
+          </a:xfrm>
+          <a:prstGeom prst="rect">
+            <a:avLst/>
+          </a:prstGeom>
+          <a:noFill/>
+          <a:ln/>
+        </p:spPr>
+        <p:txBody>
+          <a:bodyPr wrap="square" lIns="0" tIns="0" rIns="0" bIns="0" rtlCol="0" anchor="t"/>
+          <a:lstStyle/>
+          <a:p>
+            <a:pPr algn="l" indent="0" marL="0">
+              <a:lnSpc>
+                <a:spcPts val="1680"/>
+              </a:lnSpc>
+              <a:spcBef>
+                <a:spcPts val="300"/>
+              </a:spcBef>
+              <a:spcAft>
+                <a:spcPts val="300"/>
+              </a:spcAft>
+              <a:buNone/>
+            </a:pPr>
+            <a:r>
+              <a:rPr lang="en-US" sz="1200" dirty="0">
+                <a:solidFill>
+                  <a:srgbClr val="1A1A1A"/>
+                </a:solidFill>
+                <a:latin typeface="Georgia" pitchFamily="34" charset="0"/>
+                <a:ea typeface="Georgia" pitchFamily="34" charset="-122"/>
+                <a:cs typeface="Georgia" pitchFamily="34" charset="-120"/>
+              </a:rPr>
+              <a:t>Senior ·  · IKS Curriculum</a:t>
+            </a:r>
+            <a:endParaRPr lang="en-US" sz="1200" dirty="0"/>
+          </a:p>
+        </p:txBody>
+      </p:sp>
+    </p:spTree>
+  </p:cSld>
+  <p:clrMapOvr>
+    <a:masterClrMapping/>
+  </p:clrMapOvr>
+</p:sld>
+</file>
+
+<file path=ppt/slides/slide12.xml><?xml version="1.0" encoding="utf-8"?>
+<p:sld xmlns:a="http://schemas.openxmlformats.org/drawingml/2006/main" xmlns:r="http://schemas.openxmlformats.org/officeDocument/2006/relationships" xmlns:p="http://schemas.openxmlformats.org/presentationml/2006/main">
+  <p:cSld name="Slide 12">
+    <p:bg>
+      <p:bgPr>
+        <a:solidFill>
+          <a:srgbClr val="FAF7F2"/>
+        </a:solidFill>
+      </p:bgPr>
+    </p:bg>
+    <p:spTree>
+      <p:nvGrpSpPr>
+        <p:cNvPr id="1" name=""/>
+        <p:cNvGrpSpPr/>
+        <p:nvPr/>
+      </p:nvGrpSpPr>
+      <p:grpSpPr>
+        <a:xfrm>
+          <a:off x="0" y="0"/>
+          <a:ext cx="0" cy="0"/>
+          <a:chOff x="0" y="0"/>
+          <a:chExt cx="0" cy="0"/>
+        </a:xfrm>
+      </p:grpSpPr>
+      <p:sp>
+        <p:nvSpPr>
+          <p:cNvPr id="2" name="Text 0"/>
+          <p:cNvSpPr/>
+          <p:nvPr/>
+        </p:nvSpPr>
+        <p:spPr>
+          <a:xfrm>
+            <a:off x="0" y="0"/>
+            <a:ext cx="9144000" cy="101501"/>
+          </a:xfrm>
+          <a:prstGeom prst="rect">
+            <a:avLst/>
+          </a:prstGeom>
+          <a:solidFill>
+            <a:srgbClr val="5D1D2E"/>
+          </a:solidFill>
+          <a:ln/>
+        </p:spPr>
+        <p:txBody>
+          <a:bodyPr wrap="square" rtlCol="0" anchor="ctr"/>
+          <a:lstStyle/>
+          <a:p>
+            <a:pPr indent="0" marL="0">
+              <a:buNone/>
+            </a:pPr>
+            <a:endParaRPr lang="en-US" dirty="0"/>
+          </a:p>
+        </p:txBody>
+      </p:sp>
+      <p:sp>
+        <p:nvSpPr>
+          <p:cNvPr id="3" name="Text 1"/>
+          <p:cNvSpPr/>
+          <p:nvPr/>
+        </p:nvSpPr>
+        <p:spPr>
+          <a:xfrm>
+            <a:off x="406301" y="457051"/>
+            <a:ext cx="8498026" cy="274290"/>
+          </a:xfrm>
+          <a:prstGeom prst="rect">
+            <a:avLst/>
+          </a:prstGeom>
+          <a:noFill/>
+          <a:ln/>
+        </p:spPr>
+        <p:txBody>
+          <a:bodyPr wrap="square" lIns="0" tIns="0" rIns="0" bIns="0" rtlCol="0" anchor="t"/>
+          <a:lstStyle/>
+          <a:p>
+            <a:pPr algn="l" indent="0" marL="0">
+              <a:lnSpc>
+                <a:spcPts val="2160"/>
+              </a:lnSpc>
+              <a:spcBef>
+                <a:spcPts val="600"/>
+              </a:spcBef>
+              <a:spcAft>
+                <a:spcPts val="800"/>
+              </a:spcAft>
+              <a:buNone/>
+            </a:pPr>
+            <a:r>
+              <a:rPr lang="en-US" sz="1800" b="1" dirty="0">
+                <a:solidFill>
+                  <a:srgbClr val="997929"/>
+                </a:solidFill>
+                <a:latin typeface="Times New Roman" pitchFamily="34" charset="0"/>
+                <a:ea typeface="Times New Roman" pitchFamily="34" charset="-122"/>
+                <a:cs typeface="Times New Roman" pitchFamily="34" charset="-120"/>
+              </a:rPr>
+              <a:t>Wrap-up (5 min)</a:t>
+            </a:r>
+            <a:endParaRPr lang="en-US" sz="1800" dirty="0"/>
+          </a:p>
+        </p:txBody>
+      </p:sp>
+      <p:sp>
+        <p:nvSpPr>
+          <p:cNvPr id="4" name="Text 2"/>
+          <p:cNvSpPr/>
+          <p:nvPr/>
+        </p:nvSpPr>
+        <p:spPr>
+          <a:xfrm>
+            <a:off x="634901" y="883593"/>
+            <a:ext cx="8102798" cy="525661"/>
+          </a:xfrm>
+          <a:prstGeom prst="rect">
+            <a:avLst/>
+          </a:prstGeom>
+          <a:noFill/>
+          <a:ln/>
+        </p:spPr>
+        <p:txBody>
+          <a:bodyPr wrap="square" lIns="0" tIns="0" rIns="0" bIns="0" rtlCol="0" anchor="t"/>
+          <a:lstStyle/>
+          <a:p>
+            <a:pPr algn="l" marL="342900" indent="-342900">
+              <a:lnSpc>
+                <a:spcPts val="1620"/>
+              </a:lnSpc>
+              <a:spcAft>
+                <a:spcPts val="300"/>
+              </a:spcAft>
+              <a:buSzPct val="100000"/>
+              <a:buChar char="•"/>
+            </a:pPr>
+            <a:r>
+              <a:rPr lang="en-US" sz="1200" dirty="0">
+                <a:solidFill>
+                  <a:srgbClr val="1A1A1A"/>
+                </a:solidFill>
+                <a:latin typeface="Georgia" pitchFamily="34" charset="0"/>
+                <a:ea typeface="Georgia" pitchFamily="34" charset="-122"/>
+                <a:cs typeface="Georgia" pitchFamily="34" charset="-120"/>
+              </a:rPr>
+              <a:t>One-sentence exit ticket: </a:t>
+            </a:r>
+            <a:pPr algn="l" indent="0" marL="0">
+              <a:lnSpc>
+                <a:spcPts val="1620"/>
+              </a:lnSpc>
+              <a:spcAft>
+                <a:spcPts val="300"/>
+              </a:spcAft>
+              <a:buNone/>
+            </a:pPr>
+            <a:r>
+              <a:rPr lang="en-US" sz="1200" i="1" dirty="0">
+                <a:solidFill>
+                  <a:srgbClr val="1A1A1A"/>
+                </a:solidFill>
+                <a:latin typeface="Georgia" pitchFamily="34" charset="0"/>
+                <a:ea typeface="Georgia" pitchFamily="34" charset="-122"/>
+                <a:cs typeface="Georgia" pitchFamily="34" charset="-120"/>
+              </a:rPr>
+              <a:t>"What's one thing you learned today?"</a:t>
+            </a:r>
+            <a:endParaRPr lang="en-US" sz="1200" dirty="0"/>
+          </a:p>
+          <a:p>
+            <a:pPr algn="l" marL="342900" indent="-342900">
+              <a:lnSpc>
+                <a:spcPts val="1620"/>
+              </a:lnSpc>
+              <a:spcAft>
+                <a:spcPts val="300"/>
+              </a:spcAft>
+              <a:buSzPct val="100000"/>
+              <a:buChar char="•"/>
+            </a:pPr>
+            <a:r>
+              <a:rPr lang="en-US" sz="1200" dirty="0">
+                <a:solidFill>
+                  <a:srgbClr val="1A1A1A"/>
+                </a:solidFill>
+                <a:latin typeface="Georgia" pitchFamily="34" charset="0"/>
+                <a:ea typeface="Georgia" pitchFamily="34" charset="-122"/>
+                <a:cs typeface="Georgia" pitchFamily="34" charset="-120"/>
+              </a:rPr>
+              <a:t>Preview tomorrow.</a:t>
+            </a:r>
+            <a:endParaRPr lang="en-US" sz="1200" dirty="0"/>
+          </a:p>
+        </p:txBody>
+      </p:sp>
+      <p:sp>
+        <p:nvSpPr>
+          <p:cNvPr id="5" name="Text 3"/>
+          <p:cNvSpPr/>
+          <p:nvPr/>
+        </p:nvSpPr>
+        <p:spPr>
+          <a:xfrm>
+            <a:off x="406301" y="4434929"/>
+            <a:ext cx="8498026" cy="213271"/>
+          </a:xfrm>
+          <a:prstGeom prst="rect">
+            <a:avLst/>
+          </a:prstGeom>
+          <a:noFill/>
+          <a:ln/>
+        </p:spPr>
+        <p:txBody>
+          <a:bodyPr wrap="square" lIns="0" tIns="0" rIns="0" bIns="0" rtlCol="0" anchor="t"/>
+          <a:lstStyle/>
+          <a:p>
+            <a:pPr algn="l" indent="0" marL="0">
+              <a:lnSpc>
+                <a:spcPts val="1680"/>
+              </a:lnSpc>
+              <a:spcBef>
+                <a:spcPts val="300"/>
+              </a:spcBef>
+              <a:spcAft>
+                <a:spcPts val="300"/>
+              </a:spcAft>
+              <a:buNone/>
+            </a:pPr>
+            <a:r>
+              <a:rPr lang="en-US" sz="1200" dirty="0">
+                <a:solidFill>
+                  <a:srgbClr val="1A1A1A"/>
+                </a:solidFill>
+                <a:latin typeface="Georgia" pitchFamily="34" charset="0"/>
+                <a:ea typeface="Georgia" pitchFamily="34" charset="-122"/>
+                <a:cs typeface="Georgia" pitchFamily="34" charset="-120"/>
+              </a:rPr>
+              <a:t>Senior ·  · IKS Curriculum</a:t>
+            </a:r>
+            <a:endParaRPr lang="en-US" sz="1200" dirty="0"/>
+          </a:p>
+        </p:txBody>
+      </p:sp>
+    </p:spTree>
+  </p:cSld>
+  <p:clrMapOvr>
+    <a:masterClrMapping/>
+  </p:clrMapOvr>
+</p:sld>
+</file>
+
+<file path=ppt/slides/slide13.xml><?xml version="1.0" encoding="utf-8"?>
+<p:sld xmlns:a="http://schemas.openxmlformats.org/drawingml/2006/main" xmlns:r="http://schemas.openxmlformats.org/officeDocument/2006/relationships" xmlns:p="http://schemas.openxmlformats.org/presentationml/2006/main">
+  <p:cSld name="Slide 13">
+    <p:bg>
+      <p:bgPr>
+        <a:solidFill>
+          <a:srgbClr val="FAF7F2"/>
+        </a:solidFill>
+      </p:bgPr>
+    </p:bg>
+    <p:spTree>
+      <p:nvGrpSpPr>
+        <p:cNvPr id="1" name=""/>
+        <p:cNvGrpSpPr/>
+        <p:nvPr/>
+      </p:nvGrpSpPr>
+      <p:grpSpPr>
+        <a:xfrm>
+          <a:off x="0" y="0"/>
+          <a:ext cx="0" cy="0"/>
+          <a:chOff x="0" y="0"/>
+          <a:chExt cx="0" cy="0"/>
+        </a:xfrm>
+      </p:grpSpPr>
+      <p:sp>
+        <p:nvSpPr>
+          <p:cNvPr id="2" name="Text 0"/>
+          <p:cNvSpPr/>
+          <p:nvPr/>
+        </p:nvSpPr>
+        <p:spPr>
+          <a:xfrm>
+            <a:off x="0" y="0"/>
+            <a:ext cx="9144000" cy="101501"/>
+          </a:xfrm>
+          <a:prstGeom prst="rect">
+            <a:avLst/>
+          </a:prstGeom>
+          <a:solidFill>
+            <a:srgbClr val="5D1D2E"/>
+          </a:solidFill>
+          <a:ln/>
+        </p:spPr>
+        <p:txBody>
+          <a:bodyPr wrap="square" rtlCol="0" anchor="ctr"/>
+          <a:lstStyle/>
+          <a:p>
+            <a:pPr indent="0" marL="0">
+              <a:buNone/>
+            </a:pPr>
+            <a:endParaRPr lang="en-US" dirty="0"/>
+          </a:p>
+        </p:txBody>
+      </p:sp>
+      <p:sp>
+        <p:nvSpPr>
+          <p:cNvPr id="3" name="Text 1"/>
+          <p:cNvSpPr/>
+          <p:nvPr/>
+        </p:nvSpPr>
+        <p:spPr>
+          <a:xfrm>
+            <a:off x="406301" y="457051"/>
+            <a:ext cx="8498026" cy="274290"/>
+          </a:xfrm>
+          <a:prstGeom prst="rect">
+            <a:avLst/>
+          </a:prstGeom>
+          <a:noFill/>
+          <a:ln/>
+        </p:spPr>
+        <p:txBody>
+          <a:bodyPr wrap="square" lIns="0" tIns="0" rIns="0" bIns="0" rtlCol="0" anchor="t"/>
+          <a:lstStyle/>
+          <a:p>
+            <a:pPr algn="l" indent="0" marL="0">
+              <a:lnSpc>
+                <a:spcPts val="2160"/>
+              </a:lnSpc>
+              <a:spcBef>
+                <a:spcPts val="600"/>
+              </a:spcBef>
+              <a:spcAft>
+                <a:spcPts val="800"/>
+              </a:spcAft>
+              <a:buNone/>
+            </a:pPr>
+            <a:r>
+              <a:rPr lang="en-US" sz="1800" b="1" dirty="0">
+                <a:solidFill>
+                  <a:srgbClr val="997929"/>
+                </a:solidFill>
+                <a:latin typeface="Times New Roman" pitchFamily="34" charset="0"/>
+                <a:ea typeface="Times New Roman" pitchFamily="34" charset="-122"/>
+                <a:cs typeface="Times New Roman" pitchFamily="34" charset="-120"/>
+              </a:rPr>
+              <a:t>Homework</a:t>
+            </a:r>
+            <a:endParaRPr lang="en-US" sz="1800" dirty="0"/>
+          </a:p>
+        </p:txBody>
+      </p:sp>
+      <p:sp>
+        <p:nvSpPr>
+          <p:cNvPr id="4" name="Text 2"/>
+          <p:cNvSpPr/>
+          <p:nvPr/>
+        </p:nvSpPr>
+        <p:spPr>
+          <a:xfrm>
+            <a:off x="406301" y="870942"/>
+            <a:ext cx="8498026" cy="222796"/>
+          </a:xfrm>
+          <a:prstGeom prst="rect">
+            <a:avLst/>
+          </a:prstGeom>
+          <a:noFill/>
+          <a:ln/>
+        </p:spPr>
+        <p:txBody>
+          <a:bodyPr wrap="square" lIns="0" tIns="0" rIns="0" bIns="0" rtlCol="0" anchor="t"/>
+          <a:lstStyle/>
+          <a:p>
+            <a:pPr algn="l" indent="0" marL="0">
+              <a:lnSpc>
+                <a:spcPts val="1680"/>
+              </a:lnSpc>
+              <a:spcBef>
+                <a:spcPts val="300"/>
+              </a:spcBef>
+              <a:spcAft>
+                <a:spcPts val="300"/>
+              </a:spcAft>
+              <a:buNone/>
+            </a:pPr>
+            <a:r>
+              <a:rPr lang="en-US" sz="1200" dirty="0">
+                <a:solidFill>
+                  <a:srgbClr val="1A1A1A"/>
+                </a:solidFill>
+                <a:latin typeface="Georgia" pitchFamily="34" charset="0"/>
+                <a:ea typeface="Georgia" pitchFamily="34" charset="-122"/>
+                <a:cs typeface="Georgia" pitchFamily="34" charset="-120"/>
+              </a:rPr>
+              <a:t>(See </a:t>
+            </a:r>
+            <a:pPr algn="l" indent="0" marL="0">
+              <a:lnSpc>
+                <a:spcPts val="1680"/>
+              </a:lnSpc>
+              <a:spcBef>
+                <a:spcPts val="300"/>
+              </a:spcBef>
+              <a:spcAft>
+                <a:spcPts val="300"/>
+              </a:spcAft>
+              <a:buNone/>
+            </a:pPr>
+            <a:r>
+              <a:rPr lang="en-US" sz="1200" dirty="0">
+                <a:solidFill>
+                  <a:srgbClr val="1A1A1A"/>
+                </a:solidFill>
+                <a:latin typeface="Georgia" pitchFamily="34" charset="0"/>
+                <a:ea typeface="Georgia" pitchFamily="34" charset="-122"/>
+                <a:cs typeface="Georgia" pitchFamily="34" charset="-120"/>
+              </a:rPr>
+              <a:t>homework.md</a:t>
+            </a:r>
+            <a:pPr algn="l" indent="0" marL="0">
+              <a:lnSpc>
+                <a:spcPts val="1680"/>
+              </a:lnSpc>
+              <a:spcBef>
+                <a:spcPts val="300"/>
+              </a:spcBef>
+              <a:spcAft>
+                <a:spcPts val="300"/>
+              </a:spcAft>
+              <a:buNone/>
+            </a:pPr>
+            <a:r>
+              <a:rPr lang="en-US" sz="1200" dirty="0">
+                <a:solidFill>
+                  <a:srgbClr val="1A1A1A"/>
+                </a:solidFill>
+                <a:latin typeface="Georgia" pitchFamily="34" charset="0"/>
+                <a:ea typeface="Georgia" pitchFamily="34" charset="-122"/>
+                <a:cs typeface="Georgia" pitchFamily="34" charset="-120"/>
+              </a:rPr>
+              <a:t> for today's task.)</a:t>
+            </a:r>
+            <a:endParaRPr lang="en-US" sz="1200" dirty="0"/>
+          </a:p>
+        </p:txBody>
+      </p:sp>
+      <p:sp>
+        <p:nvSpPr>
+          <p:cNvPr id="5" name="Text 3"/>
+          <p:cNvSpPr/>
+          <p:nvPr/>
+        </p:nvSpPr>
+        <p:spPr>
+          <a:xfrm>
+            <a:off x="406301" y="4434929"/>
+            <a:ext cx="8498026" cy="213271"/>
+          </a:xfrm>
+          <a:prstGeom prst="rect">
+            <a:avLst/>
+          </a:prstGeom>
+          <a:noFill/>
+          <a:ln/>
+        </p:spPr>
+        <p:txBody>
+          <a:bodyPr wrap="square" lIns="0" tIns="0" rIns="0" bIns="0" rtlCol="0" anchor="t"/>
+          <a:lstStyle/>
+          <a:p>
+            <a:pPr algn="l" indent="0" marL="0">
+              <a:lnSpc>
+                <a:spcPts val="1680"/>
+              </a:lnSpc>
+              <a:spcBef>
+                <a:spcPts val="300"/>
+              </a:spcBef>
+              <a:spcAft>
+                <a:spcPts val="300"/>
+              </a:spcAft>
+              <a:buNone/>
+            </a:pPr>
+            <a:r>
+              <a:rPr lang="en-US" sz="1200" dirty="0">
+                <a:solidFill>
+                  <a:srgbClr val="1A1A1A"/>
+                </a:solidFill>
+                <a:latin typeface="Georgia" pitchFamily="34" charset="0"/>
+                <a:ea typeface="Georgia" pitchFamily="34" charset="-122"/>
+                <a:cs typeface="Georgia" pitchFamily="34" charset="-120"/>
+              </a:rPr>
+              <a:t>Senior ·  · IKS Curriculum</a:t>
+            </a:r>
+            <a:endParaRPr lang="en-US" sz="1200" dirty="0"/>
+          </a:p>
+        </p:txBody>
+      </p:sp>
+    </p:spTree>
+  </p:cSld>
+  <p:clrMapOvr>
+    <a:masterClrMapping/>
+  </p:clrMapOvr>
+</p:sld>
+</file>
+
+<file path=ppt/slides/slide14.xml><?xml version="1.0" encoding="utf-8"?>
+<p:sld xmlns:a="http://schemas.openxmlformats.org/drawingml/2006/main" xmlns:r="http://schemas.openxmlformats.org/officeDocument/2006/relationships" xmlns:p="http://schemas.openxmlformats.org/presentationml/2006/main">
+  <p:cSld name="Slide 14">
+    <p:bg>
+      <p:bgPr>
+        <a:solidFill>
+          <a:srgbClr val="FAF7F2"/>
+        </a:solidFill>
+      </p:bgPr>
+    </p:bg>
+    <p:spTree>
+      <p:nvGrpSpPr>
+        <p:cNvPr id="1" name=""/>
+        <p:cNvGrpSpPr/>
+        <p:nvPr/>
+      </p:nvGrpSpPr>
+      <p:grpSpPr>
+        <a:xfrm>
+          <a:off x="0" y="0"/>
+          <a:ext cx="0" cy="0"/>
+          <a:chOff x="0" y="0"/>
+          <a:chExt cx="0" cy="0"/>
+        </a:xfrm>
+      </p:grpSpPr>
+      <p:sp>
+        <p:nvSpPr>
+          <p:cNvPr id="2" name="Text 0"/>
+          <p:cNvSpPr/>
+          <p:nvPr/>
+        </p:nvSpPr>
+        <p:spPr>
+          <a:xfrm>
+            <a:off x="0" y="0"/>
+            <a:ext cx="9144000" cy="101501"/>
+          </a:xfrm>
+          <a:prstGeom prst="rect">
+            <a:avLst/>
+          </a:prstGeom>
+          <a:solidFill>
+            <a:srgbClr val="5D1D2E"/>
+          </a:solidFill>
+          <a:ln/>
+        </p:spPr>
+        <p:txBody>
+          <a:bodyPr wrap="square" rtlCol="0" anchor="ctr"/>
+          <a:lstStyle/>
+          <a:p>
+            <a:pPr indent="0" marL="0">
+              <a:buNone/>
+            </a:pPr>
+            <a:endParaRPr lang="en-US" dirty="0"/>
+          </a:p>
+        </p:txBody>
+      </p:sp>
+      <p:sp>
+        <p:nvSpPr>
+          <p:cNvPr id="3" name="Text 1"/>
+          <p:cNvSpPr/>
+          <p:nvPr/>
+        </p:nvSpPr>
+        <p:spPr>
+          <a:xfrm>
+            <a:off x="406301" y="457051"/>
+            <a:ext cx="8498026" cy="274290"/>
+          </a:xfrm>
+          <a:prstGeom prst="rect">
+            <a:avLst/>
+          </a:prstGeom>
+          <a:noFill/>
+          <a:ln/>
+        </p:spPr>
+        <p:txBody>
+          <a:bodyPr wrap="square" lIns="0" tIns="0" rIns="0" bIns="0" rtlCol="0" anchor="t"/>
+          <a:lstStyle/>
+          <a:p>
+            <a:pPr algn="l" indent="0" marL="0">
+              <a:lnSpc>
+                <a:spcPts val="2160"/>
+              </a:lnSpc>
+              <a:spcBef>
+                <a:spcPts val="600"/>
+              </a:spcBef>
+              <a:spcAft>
+                <a:spcPts val="800"/>
+              </a:spcAft>
+              <a:buNone/>
+            </a:pPr>
+            <a:r>
+              <a:rPr lang="en-US" sz="1800" b="1" dirty="0">
+                <a:solidFill>
+                  <a:srgbClr val="997929"/>
+                </a:solidFill>
+                <a:latin typeface="Times New Roman" pitchFamily="34" charset="0"/>
+                <a:ea typeface="Times New Roman" pitchFamily="34" charset="-122"/>
+                <a:cs typeface="Times New Roman" pitchFamily="34" charset="-120"/>
+              </a:rPr>
+              <a:t>Differentiation</a:t>
+            </a:r>
+            <a:endParaRPr lang="en-US" sz="1800" dirty="0"/>
+          </a:p>
+        </p:txBody>
+      </p:sp>
+      <p:sp>
+        <p:nvSpPr>
+          <p:cNvPr id="4" name="Text 2"/>
+          <p:cNvSpPr/>
+          <p:nvPr/>
+        </p:nvSpPr>
+        <p:spPr>
+          <a:xfrm>
+            <a:off x="634901" y="883593"/>
+            <a:ext cx="8102798" cy="525661"/>
+          </a:xfrm>
+          <a:prstGeom prst="rect">
+            <a:avLst/>
+          </a:prstGeom>
+          <a:noFill/>
+          <a:ln/>
+        </p:spPr>
+        <p:txBody>
+          <a:bodyPr wrap="square" lIns="0" tIns="0" rIns="0" bIns="0" rtlCol="0" anchor="t"/>
+          <a:lstStyle/>
+          <a:p>
+            <a:pPr algn="l" marL="342900" indent="-342900">
+              <a:lnSpc>
+                <a:spcPts val="1620"/>
+              </a:lnSpc>
+              <a:spcAft>
+                <a:spcPts val="300"/>
+              </a:spcAft>
+              <a:buSzPct val="100000"/>
+              <a:buChar char="•"/>
+            </a:pPr>
+            <a:r>
+              <a:rPr lang="en-US" sz="1200" b="1" dirty="0">
+                <a:solidFill>
+                  <a:srgbClr val="1A1A1A"/>
+                </a:solidFill>
+                <a:latin typeface="Georgia" pitchFamily="34" charset="0"/>
+                <a:ea typeface="Georgia" pitchFamily="34" charset="-122"/>
+                <a:cs typeface="Georgia" pitchFamily="34" charset="-120"/>
+              </a:rPr>
+              <a:t>Extension:</a:t>
+            </a:r>
+            <a:pPr algn="l" indent="0" marL="0">
+              <a:lnSpc>
+                <a:spcPts val="1620"/>
+              </a:lnSpc>
+              <a:spcAft>
+                <a:spcPts val="300"/>
+              </a:spcAft>
+              <a:buNone/>
+            </a:pPr>
+            <a:r>
+              <a:rPr lang="en-US" sz="1200" dirty="0">
+                <a:solidFill>
+                  <a:srgbClr val="1A1A1A"/>
+                </a:solidFill>
+                <a:latin typeface="Georgia" pitchFamily="34" charset="0"/>
+                <a:ea typeface="Georgia" pitchFamily="34" charset="-122"/>
+                <a:cs typeface="Georgia" pitchFamily="34" charset="-120"/>
+              </a:rPr>
+              <a:t> offer one open question or extra problem for fast finishers.</a:t>
+            </a:r>
+            <a:endParaRPr lang="en-US" sz="1200" dirty="0"/>
+          </a:p>
+          <a:p>
+            <a:pPr algn="l" marL="342900" indent="-342900">
+              <a:lnSpc>
+                <a:spcPts val="1620"/>
+              </a:lnSpc>
+              <a:spcAft>
+                <a:spcPts val="300"/>
+              </a:spcAft>
+              <a:buSzPct val="100000"/>
+              <a:buChar char="•"/>
+            </a:pPr>
+            <a:r>
+              <a:rPr lang="en-US" sz="1200" b="1" dirty="0">
+                <a:solidFill>
+                  <a:srgbClr val="1A1A1A"/>
+                </a:solidFill>
+                <a:latin typeface="Georgia" pitchFamily="34" charset="0"/>
+                <a:ea typeface="Georgia" pitchFamily="34" charset="-122"/>
+                <a:cs typeface="Georgia" pitchFamily="34" charset="-120"/>
+              </a:rPr>
+              <a:t>Support:</a:t>
+            </a:r>
+            <a:pPr algn="l" indent="0" marL="0">
+              <a:lnSpc>
+                <a:spcPts val="1620"/>
+              </a:lnSpc>
+              <a:spcAft>
+                <a:spcPts val="300"/>
+              </a:spcAft>
+              <a:buNone/>
+            </a:pPr>
+            <a:r>
+              <a:rPr lang="en-US" sz="1200" dirty="0">
+                <a:solidFill>
+                  <a:srgbClr val="1A1A1A"/>
+                </a:solidFill>
+                <a:latin typeface="Georgia" pitchFamily="34" charset="0"/>
+                <a:ea typeface="Georgia" pitchFamily="34" charset="-122"/>
+                <a:cs typeface="Georgia" pitchFamily="34" charset="-120"/>
+              </a:rPr>
+              <a:t> pair students who need scaffolds; offer partial outlines.</a:t>
+            </a:r>
+            <a:endParaRPr lang="en-US" sz="1200" dirty="0"/>
+          </a:p>
+        </p:txBody>
+      </p:sp>
+      <p:sp>
+        <p:nvSpPr>
+          <p:cNvPr id="5" name="Text 3"/>
+          <p:cNvSpPr/>
+          <p:nvPr/>
+        </p:nvSpPr>
+        <p:spPr>
+          <a:xfrm>
+            <a:off x="406301" y="4434929"/>
+            <a:ext cx="8498026" cy="213271"/>
+          </a:xfrm>
+          <a:prstGeom prst="rect">
+            <a:avLst/>
+          </a:prstGeom>
+          <a:noFill/>
+          <a:ln/>
+        </p:spPr>
+        <p:txBody>
+          <a:bodyPr wrap="square" lIns="0" tIns="0" rIns="0" bIns="0" rtlCol="0" anchor="t"/>
+          <a:lstStyle/>
+          <a:p>
+            <a:pPr algn="l" indent="0" marL="0">
+              <a:lnSpc>
+                <a:spcPts val="1680"/>
+              </a:lnSpc>
+              <a:spcBef>
+                <a:spcPts val="300"/>
+              </a:spcBef>
+              <a:spcAft>
+                <a:spcPts val="300"/>
+              </a:spcAft>
+              <a:buNone/>
+            </a:pPr>
+            <a:r>
+              <a:rPr lang="en-US" sz="1200" dirty="0">
+                <a:solidFill>
+                  <a:srgbClr val="1A1A1A"/>
+                </a:solidFill>
+                <a:latin typeface="Georgia" pitchFamily="34" charset="0"/>
+                <a:ea typeface="Georgia" pitchFamily="34" charset="-122"/>
+                <a:cs typeface="Georgia" pitchFamily="34" charset="-120"/>
+              </a:rPr>
+              <a:t>Senior ·  · IKS Curriculum</a:t>
+            </a:r>
+            <a:endParaRPr lang="en-US" sz="1200" dirty="0"/>
+          </a:p>
+        </p:txBody>
+      </p:sp>
+    </p:spTree>
+  </p:cSld>
+  <p:clrMapOvr>
+    <a:masterClrMapping/>
+  </p:clrMapOvr>
+</p:sld>
+</file>
+
+<file path=ppt/slides/slide15.xml><?xml version="1.0" encoding="utf-8"?>
+<p:sld xmlns:a="http://schemas.openxmlformats.org/drawingml/2006/main" xmlns:r="http://schemas.openxmlformats.org/officeDocument/2006/relationships" xmlns:p="http://schemas.openxmlformats.org/presentationml/2006/main">
+  <p:cSld name="Slide 15">
+    <p:bg>
+      <p:bgPr>
+        <a:solidFill>
+          <a:srgbClr val="FAF7F2"/>
+        </a:solidFill>
+      </p:bgPr>
+    </p:bg>
+    <p:spTree>
+      <p:nvGrpSpPr>
+        <p:cNvPr id="1" name=""/>
+        <p:cNvGrpSpPr/>
+        <p:nvPr/>
+      </p:nvGrpSpPr>
+      <p:grpSpPr>
+        <a:xfrm>
+          <a:off x="0" y="0"/>
+          <a:ext cx="0" cy="0"/>
+          <a:chOff x="0" y="0"/>
+          <a:chExt cx="0" cy="0"/>
+        </a:xfrm>
+      </p:grpSpPr>
+      <p:sp>
+        <p:nvSpPr>
+          <p:cNvPr id="2" name="Text 0"/>
+          <p:cNvSpPr/>
+          <p:nvPr/>
+        </p:nvSpPr>
+        <p:spPr>
+          <a:xfrm>
+            <a:off x="0" y="0"/>
+            <a:ext cx="9144000" cy="101501"/>
+          </a:xfrm>
+          <a:prstGeom prst="rect">
+            <a:avLst/>
+          </a:prstGeom>
+          <a:solidFill>
+            <a:srgbClr val="5D1D2E"/>
+          </a:solidFill>
+          <a:ln/>
+        </p:spPr>
+        <p:txBody>
+          <a:bodyPr wrap="square" rtlCol="0" anchor="ctr"/>
+          <a:lstStyle/>
+          <a:p>
+            <a:pPr indent="0" marL="0">
+              <a:buNone/>
+            </a:pPr>
+            <a:endParaRPr lang="en-US" dirty="0"/>
+          </a:p>
+        </p:txBody>
+      </p:sp>
+      <p:sp>
+        <p:nvSpPr>
+          <p:cNvPr id="3" name="Text 1"/>
+          <p:cNvSpPr/>
+          <p:nvPr/>
+        </p:nvSpPr>
+        <p:spPr>
+          <a:xfrm>
+            <a:off x="406301" y="457051"/>
+            <a:ext cx="8498026" cy="274290"/>
+          </a:xfrm>
+          <a:prstGeom prst="rect">
+            <a:avLst/>
+          </a:prstGeom>
+          <a:noFill/>
+          <a:ln/>
+        </p:spPr>
+        <p:txBody>
+          <a:bodyPr wrap="square" lIns="0" tIns="0" rIns="0" bIns="0" rtlCol="0" anchor="t"/>
+          <a:lstStyle/>
+          <a:p>
+            <a:pPr algn="l" indent="0" marL="0">
+              <a:lnSpc>
+                <a:spcPts val="2160"/>
+              </a:lnSpc>
+              <a:spcBef>
+                <a:spcPts val="600"/>
+              </a:spcBef>
+              <a:spcAft>
+                <a:spcPts val="800"/>
+              </a:spcAft>
+              <a:buNone/>
+            </a:pPr>
+            <a:r>
+              <a:rPr lang="en-US" sz="1800" b="1" dirty="0">
+                <a:solidFill>
+                  <a:srgbClr val="997929"/>
+                </a:solidFill>
+                <a:latin typeface="Times New Roman" pitchFamily="34" charset="0"/>
+                <a:ea typeface="Times New Roman" pitchFamily="34" charset="-122"/>
+                <a:cs typeface="Times New Roman" pitchFamily="34" charset="-120"/>
+              </a:rPr>
+              <a:t>Teacher notes</a:t>
+            </a:r>
+            <a:endParaRPr lang="en-US" sz="1800" dirty="0"/>
+          </a:p>
+        </p:txBody>
+      </p:sp>
+      <p:sp>
+        <p:nvSpPr>
+          <p:cNvPr id="4" name="Text 2"/>
+          <p:cNvSpPr/>
+          <p:nvPr/>
+        </p:nvSpPr>
+        <p:spPr>
+          <a:xfrm>
+            <a:off x="634901" y="883593"/>
+            <a:ext cx="8102798" cy="731341"/>
+          </a:xfrm>
+          <a:prstGeom prst="rect">
+            <a:avLst/>
+          </a:prstGeom>
+          <a:noFill/>
+          <a:ln/>
+        </p:spPr>
+        <p:txBody>
+          <a:bodyPr wrap="square" lIns="0" tIns="0" rIns="0" bIns="0" rtlCol="0" anchor="t"/>
+          <a:lstStyle/>
+          <a:p>
+            <a:pPr algn="l" marL="342900" indent="-342900">
+              <a:lnSpc>
+                <a:spcPts val="1620"/>
+              </a:lnSpc>
+              <a:spcAft>
+                <a:spcPts val="300"/>
+              </a:spcAft>
+              <a:buSzPct val="100000"/>
+              <a:buChar char="•"/>
+            </a:pPr>
+            <a:r>
+              <a:rPr lang="en-US" sz="1200" dirty="0">
+                <a:solidFill>
+                  <a:srgbClr val="1A1A1A"/>
+                </a:solidFill>
+                <a:latin typeface="Georgia" pitchFamily="34" charset="0"/>
+                <a:ea typeface="Georgia" pitchFamily="34" charset="-122"/>
+                <a:cs typeface="Georgia" pitchFamily="34" charset="-120"/>
+              </a:rPr>
+              <a:t>Citations: at least one quoted verse with citation per module. Day 1 already includes one if applicable; you may add more.</a:t>
+            </a:r>
+            <a:endParaRPr lang="en-US" sz="1200" dirty="0"/>
+          </a:p>
+          <a:p>
+            <a:pPr algn="l" marL="342900" indent="-342900">
+              <a:lnSpc>
+                <a:spcPts val="1620"/>
+              </a:lnSpc>
+              <a:spcAft>
+                <a:spcPts val="300"/>
+              </a:spcAft>
+              <a:buSzPct val="100000"/>
+              <a:buChar char="•"/>
+            </a:pPr>
+            <a:r>
+              <a:rPr lang="en-US" sz="1200" dirty="0">
+                <a:solidFill>
+                  <a:srgbClr val="1A1A1A"/>
+                </a:solidFill>
+                <a:latin typeface="Georgia" pitchFamily="34" charset="0"/>
+                <a:ea typeface="Georgia" pitchFamily="34" charset="-122"/>
+                <a:cs typeface="Georgia" pitchFamily="34" charset="-120"/>
+              </a:rPr>
+              <a:t>Connect to prior modules where natural (especially Module 2 pañcabhūta).</a:t>
             </a:r>
             <a:endParaRPr lang="en-US" sz="1200" dirty="0"/>
           </a:p>
@@ -2725,7 +4095,7 @@
                 <a:ea typeface="Times New Roman" pitchFamily="34" charset="-122"/>
                 <a:cs typeface="Times New Roman" pitchFamily="34" charset="-120"/>
               </a:rPr>
-              <a:t>Materials</a:t>
+              <a:t>Learning objective</a:t>
             </a:r>
             <a:endParaRPr lang="en-US" sz="1800" dirty="0"/>
           </a:p>
@@ -2773,7 +4143,7 @@
                 <a:ea typeface="Georgia" pitchFamily="34" charset="-122"/>
                 <a:cs typeface="Georgia" pitchFamily="34" charset="-120"/>
               </a:rPr>
-              <a:t>– Whiteboard / chart paper – Notebook, pen per student</a:t>
+              <a:t>By the end of this lesson, students will: apply nārāyaṇa's algorithm to build a 5×5 square.</a:t>
             </a:r>
             <a:endParaRPr lang="en-US" sz="1200" dirty="0"/>
           </a:p>
@@ -2782,52 +4152,6 @@
       <p:sp>
         <p:nvSpPr>
           <p:cNvPr id="5" name="Text 3"/>
-          <p:cNvSpPr/>
-          <p:nvPr/>
-        </p:nvSpPr>
-        <p:spPr>
-          <a:xfrm>
-            <a:off x="634901" y="1173063"/>
-            <a:ext cx="8102798" cy="281880"/>
-          </a:xfrm>
-          <a:prstGeom prst="rect">
-            <a:avLst/>
-          </a:prstGeom>
-          <a:noFill/>
-          <a:ln/>
-        </p:spPr>
-        <p:txBody>
-          <a:bodyPr wrap="square" lIns="0" tIns="0" rIns="0" bIns="0" rtlCol="0" anchor="t"/>
-          <a:lstStyle/>
-          <a:p>
-            <a:pPr algn="l" marL="342900" indent="-342900">
-              <a:lnSpc>
-                <a:spcPts val="1620"/>
-              </a:lnSpc>
-              <a:spcAft>
-                <a:spcPts val="300"/>
-              </a:spcAft>
-              <a:buSzPct val="100000"/>
-              <a:buChar char="•"/>
-            </a:pPr>
-            <a:r>
-              <a:rPr lang="en-US" sz="1200" dirty="0">
-                <a:solidFill>
-                  <a:srgbClr val="1A1A1A"/>
-                </a:solidFill>
-                <a:latin typeface="Georgia" pitchFamily="34" charset="0"/>
-                <a:ea typeface="Georgia" pitchFamily="34" charset="-122"/>
-                <a:cs typeface="Georgia" pitchFamily="34" charset="-120"/>
-              </a:rPr>
-              <a:t>(See lesson-plan.md for any day-specific materials)</a:t>
-            </a:r>
-            <a:endParaRPr lang="en-US" sz="1200" dirty="0"/>
-          </a:p>
-        </p:txBody>
-      </p:sp>
-      <p:sp>
-        <p:nvSpPr>
-          <p:cNvPr id="6" name="Text 4"/>
           <p:cNvSpPr/>
           <p:nvPr/>
         </p:nvSpPr>
@@ -2977,7 +4301,7 @@
                 <a:ea typeface="Times New Roman" pitchFamily="34" charset="-122"/>
                 <a:cs typeface="Times New Roman" pitchFamily="34" charset="-120"/>
               </a:rPr>
-              <a:t>Vocabulary introduced today</a:t>
+              <a:t>Materials</a:t>
             </a:r>
             <a:endParaRPr lang="en-US" sz="1800" dirty="0"/>
           </a:p>
@@ -2992,7 +4316,7 @@
         <p:spPr>
           <a:xfrm>
             <a:off x="634901" y="883593"/>
-            <a:ext cx="8102798" cy="281880"/>
+            <a:ext cx="8102798" cy="769441"/>
           </a:xfrm>
           <a:prstGeom prst="rect">
             <a:avLst/>
@@ -3015,24 +4339,28 @@
               <a:buChar char="•"/>
             </a:pPr>
             <a:r>
-              <a:rPr lang="en-US" sz="1200" i="1" dirty="0">
-                <a:solidFill>
-                  <a:srgbClr val="1A1A1A"/>
-                </a:solidFill>
-                <a:latin typeface="Georgia" pitchFamily="34" charset="0"/>
-                <a:ea typeface="Georgia" pitchFamily="34" charset="-122"/>
-                <a:cs typeface="Georgia" pitchFamily="34" charset="-120"/>
-              </a:rPr>
-              <a:t>bhadra-gaṇita</a:t>
-            </a:r>
-            <a:pPr algn="l" indent="0" marL="0">
+              <a:rPr lang="en-US" sz="1200" dirty="0">
+                <a:solidFill>
+                  <a:srgbClr val="1A1A1A"/>
+                </a:solidFill>
+                <a:latin typeface="Georgia" pitchFamily="34" charset="0"/>
+                <a:ea typeface="Georgia" pitchFamily="34" charset="-122"/>
+                <a:cs typeface="Georgia" pitchFamily="34" charset="-120"/>
+              </a:rPr>
+              <a:t>Whiteboard / chart paper</a:t>
+            </a:r>
+            <a:endParaRPr lang="en-US" sz="1200" dirty="0"/>
+          </a:p>
+          <a:p>
+            <a:pPr algn="l" marL="342900" indent="-342900">
               <a:lnSpc>
                 <a:spcPts val="1620"/>
               </a:lnSpc>
               <a:spcAft>
                 <a:spcPts val="300"/>
               </a:spcAft>
-              <a:buNone/>
+              <a:buSzPct val="100000"/>
+              <a:buChar char="•"/>
             </a:pPr>
             <a:r>
               <a:rPr lang="en-US" sz="1200" dirty="0">
@@ -3043,7 +4371,31 @@
                 <a:ea typeface="Georgia" pitchFamily="34" charset="-122"/>
                 <a:cs typeface="Georgia" pitchFamily="34" charset="-120"/>
               </a:rPr>
-              <a:t> (IAST: bhadra-gaṇita; lit. ""auspicious arithmetic" — the Indian term for magic squares")</a:t>
+              <a:t>Notebook, pen per student</a:t>
+            </a:r>
+            <a:endParaRPr lang="en-US" sz="1200" dirty="0"/>
+          </a:p>
+          <a:p>
+            <a:pPr algn="l" marL="342900" indent="-342900">
+              <a:lnSpc>
+                <a:spcPts val="1620"/>
+              </a:lnSpc>
+              <a:spcAft>
+                <a:spcPts val="300"/>
+              </a:spcAft>
+              <a:buSzPct val="100000"/>
+              <a:buChar char="•"/>
+            </a:pPr>
+            <a:r>
+              <a:rPr lang="en-US" sz="1200" dirty="0">
+                <a:solidFill>
+                  <a:srgbClr val="1A1A1A"/>
+                </a:solidFill>
+                <a:latin typeface="Georgia" pitchFamily="34" charset="0"/>
+                <a:ea typeface="Georgia" pitchFamily="34" charset="-122"/>
+                <a:cs typeface="Georgia" pitchFamily="34" charset="-120"/>
+              </a:rPr>
+              <a:t>(See lesson-plan.md for any day-specific materials)</a:t>
             </a:r>
             <a:endParaRPr lang="en-US" sz="1200" dirty="0"/>
           </a:p>
@@ -3201,7 +4553,7 @@
                 <a:ea typeface="Times New Roman" pitchFamily="34" charset="-122"/>
                 <a:cs typeface="Times New Roman" pitchFamily="34" charset="-120"/>
               </a:rPr>
-              <a:t>Lesson flow</a:t>
+              <a:t>Vocabulary introduced today</a:t>
             </a:r>
             <a:endParaRPr lang="en-US" sz="1800" dirty="0"/>
           </a:p>
@@ -3210,6 +4562,72 @@
       <p:sp>
         <p:nvSpPr>
           <p:cNvPr id="4" name="Text 2"/>
+          <p:cNvSpPr/>
+          <p:nvPr/>
+        </p:nvSpPr>
+        <p:spPr>
+          <a:xfrm>
+            <a:off x="634901" y="883593"/>
+            <a:ext cx="8102798" cy="281880"/>
+          </a:xfrm>
+          <a:prstGeom prst="rect">
+            <a:avLst/>
+          </a:prstGeom>
+          <a:noFill/>
+          <a:ln/>
+        </p:spPr>
+        <p:txBody>
+          <a:bodyPr wrap="square" lIns="0" tIns="0" rIns="0" bIns="0" rtlCol="0" anchor="t"/>
+          <a:lstStyle/>
+          <a:p>
+            <a:pPr algn="l" marL="342900" indent="-342900">
+              <a:lnSpc>
+                <a:spcPts val="1620"/>
+              </a:lnSpc>
+              <a:spcAft>
+                <a:spcPts val="300"/>
+              </a:spcAft>
+              <a:buSzPct val="100000"/>
+              <a:buChar char="•"/>
+            </a:pPr>
+            <a:r>
+              <a:rPr lang="en-US" sz="1200" i="1" dirty="0">
+                <a:solidFill>
+                  <a:srgbClr val="1A1A1A"/>
+                </a:solidFill>
+                <a:latin typeface="Georgia" pitchFamily="34" charset="0"/>
+                <a:ea typeface="Georgia" pitchFamily="34" charset="-122"/>
+                <a:cs typeface="Georgia" pitchFamily="34" charset="-120"/>
+              </a:rPr>
+              <a:t>bhadra-gaṇita</a:t>
+            </a:r>
+            <a:pPr algn="l" indent="0" marL="0">
+              <a:lnSpc>
+                <a:spcPts val="1620"/>
+              </a:lnSpc>
+              <a:spcAft>
+                <a:spcPts val="300"/>
+              </a:spcAft>
+              <a:buNone/>
+            </a:pPr>
+            <a:r>
+              <a:rPr lang="en-US" sz="1200" dirty="0">
+                <a:solidFill>
+                  <a:srgbClr val="1A1A1A"/>
+                </a:solidFill>
+                <a:latin typeface="Georgia" pitchFamily="34" charset="0"/>
+                <a:ea typeface="Georgia" pitchFamily="34" charset="-122"/>
+                <a:cs typeface="Georgia" pitchFamily="34" charset="-120"/>
+              </a:rPr>
+              <a:t> (IAST: bhadra-gaṇita; lit. ""auspicious arithmetic" — the Indian term for magic squares")</a:t>
+            </a:r>
+            <a:endParaRPr lang="en-US" sz="1200" dirty="0"/>
+          </a:p>
+        </p:txBody>
+      </p:sp>
+      <p:sp>
+        <p:nvSpPr>
+          <p:cNvPr id="5" name="Text 3"/>
           <p:cNvSpPr/>
           <p:nvPr/>
         </p:nvSpPr>
@@ -3359,7 +4777,7 @@
                 <a:ea typeface="Times New Roman" pitchFamily="34" charset="-122"/>
                 <a:cs typeface="Times New Roman" pitchFamily="34" charset="-120"/>
               </a:rPr>
-              <a:t>Warm-up (5 min)</a:t>
+              <a:t>Lesson flow</a:t>
             </a:r>
             <a:endParaRPr lang="en-US" sz="1800" dirty="0"/>
           </a:p>
@@ -3368,100 +4786,6 @@
       <p:sp>
         <p:nvSpPr>
           <p:cNvPr id="4" name="Text 2"/>
-          <p:cNvSpPr/>
-          <p:nvPr/>
-        </p:nvSpPr>
-        <p:spPr>
-          <a:xfrm>
-            <a:off x="406301" y="870942"/>
-            <a:ext cx="8498026" cy="426541"/>
-          </a:xfrm>
-          <a:prstGeom prst="rect">
-            <a:avLst/>
-          </a:prstGeom>
-          <a:noFill/>
-          <a:ln/>
-        </p:spPr>
-        <p:txBody>
-          <a:bodyPr wrap="square" lIns="0" tIns="0" rIns="0" bIns="0" rtlCol="0" anchor="t"/>
-          <a:lstStyle/>
-          <a:p>
-            <a:pPr algn="l" indent="0" marL="0">
-              <a:lnSpc>
-                <a:spcPts val="1680"/>
-              </a:lnSpc>
-              <a:spcBef>
-                <a:spcPts val="300"/>
-              </a:spcBef>
-              <a:spcAft>
-                <a:spcPts val="300"/>
-              </a:spcAft>
-              <a:buNone/>
-            </a:pPr>
-            <a:r>
-              <a:rPr lang="en-US" sz="1200" dirty="0">
-                <a:solidFill>
-                  <a:srgbClr val="1A1A1A"/>
-                </a:solidFill>
-                <a:latin typeface="Georgia" pitchFamily="34" charset="0"/>
-                <a:ea typeface="Georgia" pitchFamily="34" charset="-122"/>
-                <a:cs typeface="Georgia" pitchFamily="34" charset="-120"/>
-              </a:rPr>
-              <a:t>– Daily check-in: one-sentence response to </a:t>
-            </a:r>
-            <a:pPr algn="l" indent="0" marL="0">
-              <a:lnSpc>
-                <a:spcPts val="1680"/>
-              </a:lnSpc>
-              <a:spcBef>
-                <a:spcPts val="300"/>
-              </a:spcBef>
-              <a:spcAft>
-                <a:spcPts val="300"/>
-              </a:spcAft>
-              <a:buNone/>
-            </a:pPr>
-            <a:r>
-              <a:rPr lang="en-US" sz="1200" i="1" dirty="0">
-                <a:solidFill>
-                  <a:srgbClr val="1A1A1A"/>
-                </a:solidFill>
-                <a:latin typeface="Georgia" pitchFamily="34" charset="0"/>
-                <a:ea typeface="Georgia" pitchFamily="34" charset="-122"/>
-                <a:cs typeface="Georgia" pitchFamily="34" charset="-120"/>
-              </a:rPr>
-              <a:t>"What's one thing you remember about yesterday's lesson?"</a:t>
-            </a:r>
-            <a:pPr algn="l" indent="0" marL="0">
-              <a:lnSpc>
-                <a:spcPts val="1680"/>
-              </a:lnSpc>
-              <a:spcBef>
-                <a:spcPts val="300"/>
-              </a:spcBef>
-              <a:spcAft>
-                <a:spcPts val="300"/>
-              </a:spcAft>
-              <a:buNone/>
-            </a:pPr>
-            <a:r>
-              <a:rPr lang="en-US" sz="1200" dirty="0">
-                <a:solidFill>
-                  <a:srgbClr val="1A1A1A"/>
-                </a:solidFill>
-                <a:latin typeface="Georgia" pitchFamily="34" charset="0"/>
-                <a:ea typeface="Georgia" pitchFamily="34" charset="-122"/>
-                <a:cs typeface="Georgia" pitchFamily="34" charset="-120"/>
-              </a:rPr>
-              <a:t> – Hook: introduce a phenomenon or question that motivates today's concept.</a:t>
-            </a:r>
-            <a:endParaRPr lang="en-US" sz="1200" dirty="0"/>
-          </a:p>
-        </p:txBody>
-      </p:sp>
-      <p:sp>
-        <p:nvSpPr>
-          <p:cNvPr id="5" name="Text 3"/>
           <p:cNvSpPr/>
           <p:nvPr/>
         </p:nvSpPr>
@@ -3611,7 +4935,7 @@
                 <a:ea typeface="Times New Roman" pitchFamily="34" charset="-122"/>
                 <a:cs typeface="Times New Roman" pitchFamily="34" charset="-120"/>
               </a:rPr>
-              <a:t>Core (20 min)</a:t>
+              <a:t>Warm-up (5 min)</a:t>
             </a:r>
             <a:endParaRPr lang="en-US" sz="1800" dirty="0"/>
           </a:p>
@@ -3626,7 +4950,7 @@
         <p:spPr>
           <a:xfrm>
             <a:off x="634901" y="883593"/>
-            <a:ext cx="8102798" cy="281880"/>
+            <a:ext cx="8102798" cy="525661"/>
           </a:xfrm>
           <a:prstGeom prst="rect">
             <a:avLst/>
@@ -3649,15 +4973,15 @@
               <a:buChar char="•"/>
             </a:pPr>
             <a:r>
-              <a:rPr lang="en-US" sz="1200" b="1" dirty="0">
-                <a:solidFill>
-                  <a:srgbClr val="1A1A1A"/>
-                </a:solidFill>
-                <a:latin typeface="Georgia" pitchFamily="34" charset="0"/>
-                <a:ea typeface="Georgia" pitchFamily="34" charset="-122"/>
-                <a:cs typeface="Georgia" pitchFamily="34" charset="-120"/>
-              </a:rPr>
-              <a:t>State Nārāyaṇa Paṇḍita's algorithm.</a:t>
+              <a:rPr lang="en-US" sz="1200" dirty="0">
+                <a:solidFill>
+                  <a:srgbClr val="1A1A1A"/>
+                </a:solidFill>
+                <a:latin typeface="Georgia" pitchFamily="34" charset="0"/>
+                <a:ea typeface="Georgia" pitchFamily="34" charset="-122"/>
+                <a:cs typeface="Georgia" pitchFamily="34" charset="-120"/>
+              </a:rPr>
+              <a:t>Daily check-in: one-sentence response to </a:t>
             </a:r>
             <a:pPr algn="l" indent="0" marL="0">
               <a:lnSpc>
@@ -3669,88 +4993,18 @@
               <a:buNone/>
             </a:pPr>
             <a:r>
-              <a:rPr lang="en-US" sz="1200" dirty="0">
-                <a:solidFill>
-                  <a:srgbClr val="1A1A1A"/>
-                </a:solidFill>
-                <a:latin typeface="Georgia" pitchFamily="34" charset="0"/>
-                <a:ea typeface="Georgia" pitchFamily="34" charset="-122"/>
-                <a:cs typeface="Georgia" pitchFamily="34" charset="-120"/>
-              </a:rPr>
-              <a:t> For any ODD n×n, follow these steps:</a:t>
+              <a:rPr lang="en-US" sz="1200" i="1" dirty="0">
+                <a:solidFill>
+                  <a:srgbClr val="1A1A1A"/>
+                </a:solidFill>
+                <a:latin typeface="Georgia" pitchFamily="34" charset="0"/>
+                <a:ea typeface="Georgia" pitchFamily="34" charset="-122"/>
+                <a:cs typeface="Georgia" pitchFamily="34" charset="-120"/>
+              </a:rPr>
+              <a:t>"What's one thing you remember about yesterday's lesson?"</a:t>
             </a:r>
             <a:endParaRPr lang="en-US" sz="1200" dirty="0"/>
           </a:p>
-        </p:txBody>
-      </p:sp>
-      <p:sp>
-        <p:nvSpPr>
-          <p:cNvPr id="5" name="Text 3"/>
-          <p:cNvSpPr/>
-          <p:nvPr/>
-        </p:nvSpPr>
-        <p:spPr>
-          <a:xfrm>
-            <a:off x="406301" y="1254323"/>
-            <a:ext cx="8498026" cy="853083"/>
-          </a:xfrm>
-          <a:prstGeom prst="rect">
-            <a:avLst/>
-          </a:prstGeom>
-          <a:noFill/>
-          <a:ln/>
-        </p:spPr>
-        <p:txBody>
-          <a:bodyPr wrap="square" lIns="0" tIns="0" rIns="0" bIns="0" rtlCol="0" anchor="t"/>
-          <a:lstStyle/>
-          <a:p>
-            <a:pPr algn="l" indent="0" marL="0">
-              <a:lnSpc>
-                <a:spcPts val="1680"/>
-              </a:lnSpc>
-              <a:spcBef>
-                <a:spcPts val="300"/>
-              </a:spcBef>
-              <a:spcAft>
-                <a:spcPts val="300"/>
-              </a:spcAft>
-              <a:buNone/>
-            </a:pPr>
-            <a:r>
-              <a:rPr lang="en-US" sz="1200" dirty="0">
-                <a:solidFill>
-                  <a:srgbClr val="1A1A1A"/>
-                </a:solidFill>
-                <a:latin typeface="Georgia" pitchFamily="34" charset="0"/>
-                <a:ea typeface="Georgia" pitchFamily="34" charset="-122"/>
-                <a:cs typeface="Georgia" pitchFamily="34" charset="-120"/>
-              </a:rPr>
-              <a:t>– Step 1: Place 1 in the top-middle cell.    – Step 2: From the cell with k, move one up and one right (diagonal) to place k+1.    – Step 3: If you go off the top, wrap to the bottom (same column you'd have landed in).    – Step 4: If you go off the right, wrap to the left (same row).    – Step 5: If the target cell is occupied, place k+1 in the cell DIRECTLY BELOW the cell containing k instead.</a:t>
-            </a:r>
-            <a:endParaRPr lang="en-US" sz="1200" dirty="0"/>
-          </a:p>
-        </p:txBody>
-      </p:sp>
-      <p:sp>
-        <p:nvSpPr>
-          <p:cNvPr id="6" name="Text 4"/>
-          <p:cNvSpPr/>
-          <p:nvPr/>
-        </p:nvSpPr>
-        <p:spPr>
-          <a:xfrm>
-            <a:off x="634901" y="2196257"/>
-            <a:ext cx="8102798" cy="487561"/>
-          </a:xfrm>
-          <a:prstGeom prst="rect">
-            <a:avLst/>
-          </a:prstGeom>
-          <a:noFill/>
-          <a:ln/>
-        </p:spPr>
-        <p:txBody>
-          <a:bodyPr wrap="square" lIns="0" tIns="0" rIns="0" bIns="0" rtlCol="0" anchor="t"/>
-          <a:lstStyle/>
           <a:p>
             <a:pPr algn="l" marL="342900" indent="-342900">
               <a:lnSpc>
@@ -3763,26 +5017,6 @@
               <a:buChar char="•"/>
             </a:pPr>
             <a:r>
-              <a:rPr lang="en-US" sz="1200" b="1" dirty="0">
-                <a:solidFill>
-                  <a:srgbClr val="1A1A1A"/>
-                </a:solidFill>
-                <a:latin typeface="Georgia" pitchFamily="34" charset="0"/>
-                <a:ea typeface="Georgia" pitchFamily="34" charset="-122"/>
-                <a:cs typeface="Georgia" pitchFamily="34" charset="-120"/>
-              </a:rPr>
-              <a:t>Demonstrate on 3×3.</a:t>
-            </a:r>
-            <a:pPr algn="l" indent="0" marL="0">
-              <a:lnSpc>
-                <a:spcPts val="1620"/>
-              </a:lnSpc>
-              <a:spcAft>
-                <a:spcPts val="300"/>
-              </a:spcAft>
-              <a:buNone/>
-            </a:pPr>
-            <a:r>
               <a:rPr lang="en-US" sz="1200" dirty="0">
                 <a:solidFill>
                   <a:srgbClr val="1A1A1A"/>
@@ -3791,7 +5025,7 @@
                 <a:ea typeface="Georgia" pitchFamily="34" charset="-122"/>
                 <a:cs typeface="Georgia" pitchFamily="34" charset="-120"/>
               </a:rPr>
-              <a:t> Place 1 top-middle. Move up-right (wraps to bottom row, same column shift) → 2 goes bottom-right. Continue:</a:t>
+              <a:t>Hook: introduce a phenomenon or question that motivates today's concept.</a:t>
             </a:r>
             <a:endParaRPr lang="en-US" sz="1200" dirty="0"/>
           </a:p>
@@ -3799,558 +5033,13 @@
       </p:sp>
       <p:sp>
         <p:nvSpPr>
-          <p:cNvPr id="7" name="Text 5"/>
-          <p:cNvSpPr/>
-          <p:nvPr/>
-        </p:nvSpPr>
-        <p:spPr>
-          <a:xfrm>
-            <a:off x="406301" y="2785318"/>
-            <a:ext cx="8331398" cy="777627"/>
-          </a:xfrm>
-          <a:prstGeom prst="rect">
-            <a:avLst/>
-          </a:prstGeom>
-          <a:solidFill>
-            <a:srgbClr val="FFFFFF"/>
-          </a:solidFill>
-          <a:ln/>
-        </p:spPr>
-        <p:txBody>
-          <a:bodyPr wrap="square" rtlCol="0" anchor="ctr"/>
-          <a:lstStyle/>
-          <a:p>
-            <a:pPr indent="0" marL="0">
-              <a:buNone/>
-            </a:pPr>
-            <a:endParaRPr lang="en-US" dirty="0"/>
-          </a:p>
-        </p:txBody>
-      </p:sp>
-      <p:sp>
-        <p:nvSpPr>
-          <p:cNvPr id="8" name="Shape 6"/>
-          <p:cNvSpPr/>
-          <p:nvPr/>
-        </p:nvSpPr>
-        <p:spPr>
-          <a:xfrm>
-            <a:off x="430113" y="2785318"/>
-            <a:ext cx="0" cy="777627"/>
-          </a:xfrm>
-          <a:prstGeom prst="line">
-            <a:avLst/>
-          </a:prstGeom>
-          <a:noFill/>
-          <a:ln w="47625">
-            <a:solidFill>
-              <a:srgbClr val="5D1D2E"/>
-            </a:solidFill>
-            <a:prstDash val="solid"/>
-          </a:ln>
-        </p:spPr>
-      </p:sp>
-      <p:sp>
-        <p:nvSpPr>
-          <p:cNvPr id="9" name="Text 7"/>
-          <p:cNvSpPr/>
-          <p:nvPr/>
-        </p:nvSpPr>
-        <p:spPr>
-          <a:xfrm>
-            <a:off x="631627" y="2912269"/>
-            <a:ext cx="8086939" cy="174575"/>
-          </a:xfrm>
-          <a:prstGeom prst="rect">
-            <a:avLst/>
-          </a:prstGeom>
-          <a:noFill/>
-          <a:ln/>
-        </p:spPr>
-        <p:txBody>
-          <a:bodyPr wrap="square" lIns="0" tIns="0" rIns="0" bIns="0" rtlCol="0" anchor="t"/>
-          <a:lstStyle/>
-          <a:p>
-            <a:pPr algn="l" indent="0" marL="0">
-              <a:lnSpc>
-                <a:spcPts val="1375"/>
-              </a:lnSpc>
-              <a:buNone/>
-            </a:pPr>
-            <a:r>
-              <a:rPr lang="en-US" sz="1100" dirty="0">
-                <a:solidFill>
-                  <a:srgbClr val="1A1A1A"/>
-                </a:solidFill>
-                <a:latin typeface="Courier New" pitchFamily="34" charset="0"/>
-                <a:ea typeface="Courier New" pitchFamily="34" charset="-122"/>
-                <a:cs typeface="Courier New" pitchFamily="34" charset="-120"/>
-              </a:rPr>
-              <a:t>8 1 6</a:t>
-            </a:r>
-            <a:endParaRPr lang="en-US" sz="1100" dirty="0"/>
-          </a:p>
-        </p:txBody>
-      </p:sp>
-      <p:sp>
-        <p:nvSpPr>
-          <p:cNvPr id="10" name="Text 8"/>
-          <p:cNvSpPr/>
-          <p:nvPr/>
-        </p:nvSpPr>
-        <p:spPr>
-          <a:xfrm>
-            <a:off x="631627" y="3086844"/>
-            <a:ext cx="8086939" cy="174575"/>
-          </a:xfrm>
-          <a:prstGeom prst="rect">
-            <a:avLst/>
-          </a:prstGeom>
-          <a:noFill/>
-          <a:ln/>
-        </p:spPr>
-        <p:txBody>
-          <a:bodyPr wrap="square" lIns="0" tIns="0" rIns="0" bIns="0" rtlCol="0" anchor="t"/>
-          <a:lstStyle/>
-          <a:p>
-            <a:pPr algn="l" indent="0" marL="0">
-              <a:lnSpc>
-                <a:spcPts val="1375"/>
-              </a:lnSpc>
-              <a:buNone/>
-            </a:pPr>
-            <a:r>
-              <a:rPr lang="en-US" sz="1100" dirty="0">
-                <a:solidFill>
-                  <a:srgbClr val="1A1A1A"/>
-                </a:solidFill>
-                <a:latin typeface="Courier New" pitchFamily="34" charset="0"/>
-                <a:ea typeface="Courier New" pitchFamily="34" charset="-122"/>
-                <a:cs typeface="Courier New" pitchFamily="34" charset="-120"/>
-              </a:rPr>
-              <a:t>3 5 7</a:t>
-            </a:r>
-            <a:endParaRPr lang="en-US" sz="1100" dirty="0"/>
-          </a:p>
-        </p:txBody>
-      </p:sp>
-      <p:sp>
-        <p:nvSpPr>
-          <p:cNvPr id="11" name="Text 9"/>
-          <p:cNvSpPr/>
-          <p:nvPr/>
-        </p:nvSpPr>
-        <p:spPr>
-          <a:xfrm>
-            <a:off x="631627" y="3261420"/>
-            <a:ext cx="8086939" cy="174575"/>
-          </a:xfrm>
-          <a:prstGeom prst="rect">
-            <a:avLst/>
-          </a:prstGeom>
-          <a:noFill/>
-          <a:ln/>
-        </p:spPr>
-        <p:txBody>
-          <a:bodyPr wrap="square" lIns="0" tIns="0" rIns="0" bIns="0" rtlCol="0" anchor="t"/>
-          <a:lstStyle/>
-          <a:p>
-            <a:pPr algn="l" indent="0" marL="0">
-              <a:lnSpc>
-                <a:spcPts val="1375"/>
-              </a:lnSpc>
-              <a:buNone/>
-            </a:pPr>
-            <a:r>
-              <a:rPr lang="en-US" sz="1100" dirty="0">
-                <a:solidFill>
-                  <a:srgbClr val="1A1A1A"/>
-                </a:solidFill>
-                <a:latin typeface="Courier New" pitchFamily="34" charset="0"/>
-                <a:ea typeface="Courier New" pitchFamily="34" charset="-122"/>
-                <a:cs typeface="Courier New" pitchFamily="34" charset="-120"/>
-              </a:rPr>
-              <a:t>4 9 2</a:t>
-            </a:r>
-            <a:endParaRPr lang="en-US" sz="1100" dirty="0"/>
-          </a:p>
-        </p:txBody>
-      </p:sp>
-      <p:sp>
-        <p:nvSpPr>
-          <p:cNvPr id="12" name="Text 10"/>
-          <p:cNvSpPr/>
-          <p:nvPr/>
-        </p:nvSpPr>
-        <p:spPr>
-          <a:xfrm>
-            <a:off x="406301" y="3651796"/>
-            <a:ext cx="8498026" cy="426541"/>
-          </a:xfrm>
-          <a:prstGeom prst="rect">
-            <a:avLst/>
-          </a:prstGeom>
-          <a:noFill/>
-          <a:ln/>
-        </p:spPr>
-        <p:txBody>
-          <a:bodyPr wrap="square" lIns="0" tIns="0" rIns="0" bIns="0" rtlCol="0" anchor="t"/>
-          <a:lstStyle/>
-          <a:p>
-            <a:pPr algn="l" indent="0" marL="0">
-              <a:lnSpc>
-                <a:spcPts val="1680"/>
-              </a:lnSpc>
-              <a:spcBef>
-                <a:spcPts val="300"/>
-              </a:spcBef>
-              <a:spcAft>
-                <a:spcPts val="300"/>
-              </a:spcAft>
-              <a:buNone/>
-            </a:pPr>
-            <a:r>
-              <a:rPr lang="en-US" sz="1200" dirty="0">
-                <a:solidFill>
-                  <a:srgbClr val="1A1A1A"/>
-                </a:solidFill>
-                <a:latin typeface="Georgia" pitchFamily="34" charset="0"/>
-                <a:ea typeface="Georgia" pitchFamily="34" charset="-122"/>
-                <a:cs typeface="Georgia" pitchFamily="34" charset="-120"/>
-              </a:rPr>
-              <a:t>Verify: rows, columns, diagonals all = 15. ✓ (Note: this is a different symmetric variant of the 3×3 magic square than yesterday's.)</a:t>
-            </a:r>
-            <a:endParaRPr lang="en-US" sz="1200" dirty="0"/>
-          </a:p>
-        </p:txBody>
-      </p:sp>
-      <p:sp>
-        <p:nvSpPr>
-          <p:cNvPr id="13" name="Text 11"/>
-          <p:cNvSpPr/>
-          <p:nvPr/>
-        </p:nvSpPr>
-        <p:spPr>
-          <a:xfrm>
-            <a:off x="634901" y="4167188"/>
-            <a:ext cx="8102798" cy="487561"/>
-          </a:xfrm>
-          <a:prstGeom prst="rect">
-            <a:avLst/>
-          </a:prstGeom>
-          <a:noFill/>
-          <a:ln/>
-        </p:spPr>
-        <p:txBody>
-          <a:bodyPr wrap="square" lIns="0" tIns="0" rIns="0" bIns="0" rtlCol="0" anchor="t"/>
-          <a:lstStyle/>
-          <a:p>
-            <a:pPr algn="l" marL="342900" indent="-342900">
-              <a:lnSpc>
-                <a:spcPts val="1620"/>
-              </a:lnSpc>
-              <a:spcAft>
-                <a:spcPts val="300"/>
-              </a:spcAft>
-              <a:buSzPct val="100000"/>
-              <a:buChar char="•"/>
-            </a:pPr>
-            <a:r>
-              <a:rPr lang="en-US" sz="1200" b="1" dirty="0">
-                <a:solidFill>
-                  <a:srgbClr val="1A1A1A"/>
-                </a:solidFill>
-                <a:latin typeface="Georgia" pitchFamily="34" charset="0"/>
-                <a:ea typeface="Georgia" pitchFamily="34" charset="-122"/>
-                <a:cs typeface="Georgia" pitchFamily="34" charset="-120"/>
-              </a:rPr>
-              <a:t>Source.</a:t>
-            </a:r>
-            <a:pPr algn="l" indent="0" marL="0">
-              <a:lnSpc>
-                <a:spcPts val="1620"/>
-              </a:lnSpc>
-              <a:spcAft>
-                <a:spcPts val="300"/>
-              </a:spcAft>
-              <a:buNone/>
-            </a:pPr>
-            <a:r>
-              <a:rPr lang="en-US" sz="1200" dirty="0">
-                <a:solidFill>
-                  <a:srgbClr val="1A1A1A"/>
-                </a:solidFill>
-                <a:latin typeface="Georgia" pitchFamily="34" charset="0"/>
-                <a:ea typeface="Georgia" pitchFamily="34" charset="-122"/>
-                <a:cs typeface="Georgia" pitchFamily="34" charset="-120"/>
-              </a:rPr>
-              <a:t> Nārāyaṇa Paṇḍita's </a:t>
-            </a:r>
-            <a:pPr algn="l" indent="0" marL="0">
-              <a:lnSpc>
-                <a:spcPts val="1620"/>
-              </a:lnSpc>
-              <a:spcAft>
-                <a:spcPts val="300"/>
-              </a:spcAft>
-              <a:buNone/>
-            </a:pPr>
-            <a:r>
-              <a:rPr lang="en-US" sz="1200" i="1" dirty="0">
-                <a:solidFill>
-                  <a:srgbClr val="1A1A1A"/>
-                </a:solidFill>
-                <a:latin typeface="Georgia" pitchFamily="34" charset="0"/>
-                <a:ea typeface="Georgia" pitchFamily="34" charset="-122"/>
-                <a:cs typeface="Georgia" pitchFamily="34" charset="-120"/>
-              </a:rPr>
-              <a:t>Gaṇita-kaumudī</a:t>
-            </a:r>
-            <a:pPr algn="l" indent="0" marL="0">
-              <a:lnSpc>
-                <a:spcPts val="1620"/>
-              </a:lnSpc>
-              <a:spcAft>
-                <a:spcPts val="300"/>
-              </a:spcAft>
-              <a:buNone/>
-            </a:pPr>
-            <a:r>
-              <a:rPr lang="en-US" sz="1200" dirty="0">
-                <a:solidFill>
-                  <a:srgbClr val="1A1A1A"/>
-                </a:solidFill>
-                <a:latin typeface="Georgia" pitchFamily="34" charset="0"/>
-                <a:ea typeface="Georgia" pitchFamily="34" charset="-122"/>
-                <a:cs typeface="Georgia" pitchFamily="34" charset="-120"/>
-              </a:rPr>
-              <a:t> (1356 CE), Book 14 (</a:t>
-            </a:r>
-            <a:pPr algn="l" indent="0" marL="0">
-              <a:lnSpc>
-                <a:spcPts val="1620"/>
-              </a:lnSpc>
-              <a:spcAft>
-                <a:spcPts val="300"/>
-              </a:spcAft>
-              <a:buNone/>
-            </a:pPr>
-            <a:r>
-              <a:rPr lang="en-US" sz="1200" i="1" dirty="0">
-                <a:solidFill>
-                  <a:srgbClr val="1A1A1A"/>
-                </a:solidFill>
-                <a:latin typeface="Georgia" pitchFamily="34" charset="0"/>
-                <a:ea typeface="Georgia" pitchFamily="34" charset="-122"/>
-                <a:cs typeface="Georgia" pitchFamily="34" charset="-120"/>
-              </a:rPr>
-              <a:t>Bhadra-gaṇita</a:t>
-            </a:r>
-            <a:pPr algn="l" indent="0" marL="0">
-              <a:lnSpc>
-                <a:spcPts val="1620"/>
-              </a:lnSpc>
-              <a:spcAft>
-                <a:spcPts val="300"/>
-              </a:spcAft>
-              <a:buNone/>
-            </a:pPr>
-            <a:r>
-              <a:rPr lang="en-US" sz="1200" dirty="0">
-                <a:solidFill>
-                  <a:srgbClr val="1A1A1A"/>
-                </a:solidFill>
-                <a:latin typeface="Georgia" pitchFamily="34" charset="0"/>
-                <a:ea typeface="Georgia" pitchFamily="34" charset="-122"/>
-                <a:cs typeface="Georgia" pitchFamily="34" charset="-120"/>
-              </a:rPr>
-              <a:t>). He calls this method </a:t>
-            </a:r>
-            <a:pPr algn="l" indent="0" marL="0">
-              <a:lnSpc>
-                <a:spcPts val="1620"/>
-              </a:lnSpc>
-              <a:spcAft>
-                <a:spcPts val="300"/>
-              </a:spcAft>
-              <a:buNone/>
-            </a:pPr>
-            <a:r>
-              <a:rPr lang="en-US" sz="1200" i="1" dirty="0">
-                <a:solidFill>
-                  <a:srgbClr val="1A1A1A"/>
-                </a:solidFill>
-                <a:latin typeface="Georgia" pitchFamily="34" charset="0"/>
-                <a:ea typeface="Georgia" pitchFamily="34" charset="-122"/>
-                <a:cs typeface="Georgia" pitchFamily="34" charset="-120"/>
-              </a:rPr>
-              <a:t>turagagati</a:t>
-            </a:r>
-            <a:pPr algn="l" indent="0" marL="0">
-              <a:lnSpc>
-                <a:spcPts val="1620"/>
-              </a:lnSpc>
-              <a:spcAft>
-                <a:spcPts val="300"/>
-              </a:spcAft>
-              <a:buNone/>
-            </a:pPr>
-            <a:r>
-              <a:rPr lang="en-US" sz="1200" dirty="0">
-                <a:solidFill>
-                  <a:srgbClr val="1A1A1A"/>
-                </a:solidFill>
-                <a:latin typeface="Georgia" pitchFamily="34" charset="0"/>
-                <a:ea typeface="Georgia" pitchFamily="34" charset="-122"/>
-                <a:cs typeface="Georgia" pitchFamily="34" charset="-120"/>
-              </a:rPr>
-              <a:t> — "horse-step" (knight-like move).</a:t>
-            </a:r>
-            <a:endParaRPr lang="en-US" sz="1200" dirty="0"/>
-          </a:p>
-        </p:txBody>
-      </p:sp>
-      <p:sp>
-        <p:nvSpPr>
-          <p:cNvPr id="14" name="Text 12"/>
-          <p:cNvSpPr/>
-          <p:nvPr/>
-        </p:nvSpPr>
-        <p:spPr>
-          <a:xfrm>
-            <a:off x="634901" y="4756249"/>
-            <a:ext cx="8102798" cy="487561"/>
-          </a:xfrm>
-          <a:prstGeom prst="rect">
-            <a:avLst/>
-          </a:prstGeom>
-          <a:noFill/>
-          <a:ln/>
-        </p:spPr>
-        <p:txBody>
-          <a:bodyPr wrap="square" lIns="0" tIns="0" rIns="0" bIns="0" rtlCol="0" anchor="t"/>
-          <a:lstStyle/>
-          <a:p>
-            <a:pPr algn="l" marL="342900" indent="-342900">
-              <a:lnSpc>
-                <a:spcPts val="1620"/>
-              </a:lnSpc>
-              <a:spcAft>
-                <a:spcPts val="300"/>
-              </a:spcAft>
-              <a:buSzPct val="100000"/>
-              <a:buChar char="•"/>
-            </a:pPr>
-            <a:r>
-              <a:rPr lang="en-US" sz="1200" b="1" dirty="0">
-                <a:solidFill>
-                  <a:srgbClr val="1A1A1A"/>
-                </a:solidFill>
-                <a:latin typeface="Georgia" pitchFamily="34" charset="0"/>
-                <a:ea typeface="Georgia" pitchFamily="34" charset="-122"/>
-                <a:cs typeface="Georgia" pitchFamily="34" charset="-120"/>
-              </a:rPr>
-              <a:t>Cross-cultural.</a:t>
-            </a:r>
-            <a:pPr algn="l" indent="0" marL="0">
-              <a:lnSpc>
-                <a:spcPts val="1620"/>
-              </a:lnSpc>
-              <a:spcAft>
-                <a:spcPts val="300"/>
-              </a:spcAft>
-              <a:buNone/>
-            </a:pPr>
-            <a:r>
-              <a:rPr lang="en-US" sz="1200" dirty="0">
-                <a:solidFill>
-                  <a:srgbClr val="1A1A1A"/>
-                </a:solidFill>
-                <a:latin typeface="Georgia" pitchFamily="34" charset="0"/>
-                <a:ea typeface="Georgia" pitchFamily="34" charset="-122"/>
-                <a:cs typeface="Georgia" pitchFamily="34" charset="-120"/>
-              </a:rPr>
-              <a:t> The same method was independently discovered or transmitted in Arabic and European mathematics. The earliest extant Indian description is Nārāyaṇa's.</a:t>
-            </a:r>
-            <a:endParaRPr lang="en-US" sz="1200" dirty="0"/>
-          </a:p>
-        </p:txBody>
-      </p:sp>
-      <p:sp>
-        <p:nvSpPr>
-          <p:cNvPr id="15" name="Text 13"/>
-          <p:cNvSpPr/>
-          <p:nvPr/>
-        </p:nvSpPr>
-        <p:spPr>
-          <a:xfrm>
-            <a:off x="634901" y="5345311"/>
-            <a:ext cx="8102798" cy="487561"/>
-          </a:xfrm>
-          <a:prstGeom prst="rect">
-            <a:avLst/>
-          </a:prstGeom>
-          <a:noFill/>
-          <a:ln/>
-        </p:spPr>
-        <p:txBody>
-          <a:bodyPr wrap="square" lIns="0" tIns="0" rIns="0" bIns="0" rtlCol="0" anchor="t"/>
-          <a:lstStyle/>
-          <a:p>
-            <a:pPr algn="l" marL="342900" indent="-342900">
-              <a:lnSpc>
-                <a:spcPts val="1620"/>
-              </a:lnSpc>
-              <a:spcAft>
-                <a:spcPts val="300"/>
-              </a:spcAft>
-              <a:buSzPct val="100000"/>
-              <a:buChar char="•"/>
-            </a:pPr>
-            <a:r>
-              <a:rPr lang="en-US" sz="1200" b="1" dirty="0">
-                <a:solidFill>
-                  <a:srgbClr val="1A1A1A"/>
-                </a:solidFill>
-                <a:latin typeface="Georgia" pitchFamily="34" charset="0"/>
-                <a:ea typeface="Georgia" pitchFamily="34" charset="-122"/>
-                <a:cs typeface="Georgia" pitchFamily="34" charset="-120"/>
-              </a:rPr>
-              <a:t>Try on your own.</a:t>
-            </a:r>
-            <a:pPr algn="l" indent="0" marL="0">
-              <a:lnSpc>
-                <a:spcPts val="1620"/>
-              </a:lnSpc>
-              <a:spcAft>
-                <a:spcPts val="300"/>
-              </a:spcAft>
-              <a:buNone/>
-            </a:pPr>
-            <a:r>
-              <a:rPr lang="en-US" sz="1200" dirty="0">
-                <a:solidFill>
-                  <a:srgbClr val="1A1A1A"/>
-                </a:solidFill>
-                <a:latin typeface="Georgia" pitchFamily="34" charset="0"/>
-                <a:ea typeface="Georgia" pitchFamily="34" charset="-122"/>
-                <a:cs typeface="Georgia" pitchFamily="34" charset="-120"/>
-              </a:rPr>
-              <a:t> Each student applies the algorithm to construct another 3×3 magic square. Tomorrow we extend to 5×5.</a:t>
-            </a:r>
-            <a:endParaRPr lang="en-US" sz="1200" dirty="0"/>
-          </a:p>
-        </p:txBody>
-      </p:sp>
-      <p:sp>
-        <p:nvSpPr>
-          <p:cNvPr id="16" name="Text 14"/>
-          <p:cNvSpPr/>
-          <p:nvPr/>
-        </p:nvSpPr>
-        <p:spPr>
-          <a:xfrm>
-            <a:off x="406301" y="5997922"/>
+          <p:cNvPr id="5" name="Text 3"/>
+          <p:cNvSpPr/>
+          <p:nvPr/>
+        </p:nvSpPr>
+        <p:spPr>
+          <a:xfrm>
+            <a:off x="406301" y="4434929"/>
             <a:ext cx="8498026" cy="213271"/>
           </a:xfrm>
           <a:prstGeom prst="rect">
@@ -4494,7 +5183,7 @@
                 <a:ea typeface="Times New Roman" pitchFamily="34" charset="-122"/>
                 <a:cs typeface="Times New Roman" pitchFamily="34" charset="-120"/>
               </a:rPr>
-              <a:t>Activity (15 min)</a:t>
+              <a:t>Core (20 min)</a:t>
             </a:r>
             <a:endParaRPr lang="en-US" sz="1800" dirty="0"/>
           </a:p>
@@ -4508,8 +5197,8 @@
         </p:nvSpPr>
         <p:spPr>
           <a:xfrm>
-            <a:off x="406301" y="870942"/>
-            <a:ext cx="8498026" cy="436066"/>
+            <a:off x="634901" y="883593"/>
+            <a:ext cx="8102798" cy="281880"/>
           </a:xfrm>
           <a:prstGeom prst="rect">
             <a:avLst/>
@@ -4521,13 +5210,31 @@
           <a:bodyPr wrap="square" lIns="0" tIns="0" rIns="0" bIns="0" rtlCol="0" anchor="t"/>
           <a:lstStyle/>
           <a:p>
+            <a:pPr algn="l" marL="342900" indent="-342900">
+              <a:lnSpc>
+                <a:spcPts val="1620"/>
+              </a:lnSpc>
+              <a:spcAft>
+                <a:spcPts val="300"/>
+              </a:spcAft>
+              <a:buSzPct val="100000"/>
+              <a:buChar char="•"/>
+            </a:pPr>
+            <a:r>
+              <a:rPr lang="en-US" sz="1200" b="1" dirty="0">
+                <a:solidFill>
+                  <a:srgbClr val="1A1A1A"/>
+                </a:solidFill>
+                <a:latin typeface="Georgia" pitchFamily="34" charset="0"/>
+                <a:ea typeface="Georgia" pitchFamily="34" charset="-122"/>
+                <a:cs typeface="Georgia" pitchFamily="34" charset="-120"/>
+              </a:rPr>
+              <a:t>State Nārāyaṇa Paṇḍita's algorithm.</a:t>
+            </a:r>
             <a:pPr algn="l" indent="0" marL="0">
               <a:lnSpc>
-                <a:spcPts val="1680"/>
-              </a:lnSpc>
-              <a:spcBef>
-                <a:spcPts val="300"/>
-              </a:spcBef>
+                <a:spcPts val="1620"/>
+              </a:lnSpc>
               <a:spcAft>
                 <a:spcPts val="300"/>
               </a:spcAft>
@@ -4542,42 +5249,42 @@
                 <a:ea typeface="Georgia" pitchFamily="34" charset="-122"/>
                 <a:cs typeface="Georgia" pitchFamily="34" charset="-120"/>
               </a:rPr>
-              <a:t>A scaled version of </a:t>
-            </a:r>
-            <a:pPr algn="l" indent="0" marL="0">
-              <a:lnSpc>
-                <a:spcPts val="1680"/>
-              </a:lnSpc>
-              <a:spcBef>
-                <a:spcPts val="300"/>
-              </a:spcBef>
-              <a:spcAft>
-                <a:spcPts val="300"/>
-              </a:spcAft>
-              <a:buNone/>
-            </a:pPr>
-            <a:r>
-              <a:rPr lang="en-US" sz="1200" i="1" dirty="0">
-                <a:solidFill>
-                  <a:srgbClr val="1A1A1A"/>
-                </a:solidFill>
-                <a:latin typeface="Georgia" pitchFamily="34" charset="0"/>
-                <a:ea typeface="Georgia" pitchFamily="34" charset="-122"/>
-                <a:cs typeface="Georgia" pitchFamily="34" charset="-120"/>
-              </a:rPr>
-              <a:t>Class 3×3 Magic-Square Tournament</a:t>
-            </a:r>
-            <a:pPr algn="l" indent="0" marL="0">
-              <a:lnSpc>
-                <a:spcPts val="1680"/>
-              </a:lnSpc>
-              <a:spcBef>
-                <a:spcPts val="300"/>
-              </a:spcBef>
-              <a:spcAft>
-                <a:spcPts val="300"/>
-              </a:spcAft>
-              <a:buNone/>
+              <a:t> For any ODD n×n, follow these steps:</a:t>
+            </a:r>
+            <a:endParaRPr lang="en-US" sz="1200" dirty="0"/>
+          </a:p>
+        </p:txBody>
+      </p:sp>
+      <p:sp>
+        <p:nvSpPr>
+          <p:cNvPr id="5" name="Text 3"/>
+          <p:cNvSpPr/>
+          <p:nvPr/>
+        </p:nvSpPr>
+        <p:spPr>
+          <a:xfrm>
+            <a:off x="634901" y="1266974"/>
+            <a:ext cx="8102798" cy="1257002"/>
+          </a:xfrm>
+          <a:prstGeom prst="rect">
+            <a:avLst/>
+          </a:prstGeom>
+          <a:noFill/>
+          <a:ln/>
+        </p:spPr>
+        <p:txBody>
+          <a:bodyPr wrap="square" lIns="0" tIns="0" rIns="0" bIns="0" rtlCol="0" anchor="t"/>
+          <a:lstStyle/>
+          <a:p>
+            <a:pPr algn="l" marL="342900" indent="-342900">
+              <a:lnSpc>
+                <a:spcPts val="1620"/>
+              </a:lnSpc>
+              <a:spcAft>
+                <a:spcPts val="300"/>
+              </a:spcAft>
+              <a:buSzPct val="100000"/>
+              <a:buChar char="•"/>
             </a:pPr>
             <a:r>
               <a:rPr lang="en-US" sz="1200" dirty="0">
@@ -4588,19 +5295,20 @@
                 <a:ea typeface="Georgia" pitchFamily="34" charset="-122"/>
                 <a:cs typeface="Georgia" pitchFamily="34" charset="-120"/>
               </a:rPr>
-              <a:t> (see </a:t>
-            </a:r>
-            <a:pPr algn="l" indent="0" marL="0">
-              <a:lnSpc>
-                <a:spcPts val="1680"/>
-              </a:lnSpc>
-              <a:spcBef>
-                <a:spcPts val="300"/>
-              </a:spcBef>
-              <a:spcAft>
-                <a:spcPts val="300"/>
-              </a:spcAft>
-              <a:buNone/>
+              <a:t>Step 1: Place 1 in the top-middle cell.</a:t>
+            </a:r>
+            <a:endParaRPr lang="en-US" sz="1200" dirty="0"/>
+          </a:p>
+          <a:p>
+            <a:pPr algn="l" marL="342900" indent="-342900">
+              <a:lnSpc>
+                <a:spcPts val="1620"/>
+              </a:lnSpc>
+              <a:spcAft>
+                <a:spcPts val="300"/>
+              </a:spcAft>
+              <a:buSzPct val="100000"/>
+              <a:buChar char="•"/>
             </a:pPr>
             <a:r>
               <a:rPr lang="en-US" sz="1200" dirty="0">
@@ -4611,19 +5319,20 @@
                 <a:ea typeface="Georgia" pitchFamily="34" charset="-122"/>
                 <a:cs typeface="Georgia" pitchFamily="34" charset="-120"/>
               </a:rPr>
-              <a:t>activities/</a:t>
-            </a:r>
-            <a:pPr algn="l" indent="0" marL="0">
-              <a:lnSpc>
-                <a:spcPts val="1680"/>
-              </a:lnSpc>
-              <a:spcBef>
-                <a:spcPts val="300"/>
-              </a:spcBef>
-              <a:spcAft>
-                <a:spcPts val="300"/>
-              </a:spcAft>
-              <a:buNone/>
+              <a:t>Step 2: From the cell with k, move one up and one right (diagonal) to place k+1.</a:t>
+            </a:r>
+            <a:endParaRPr lang="en-US" sz="1200" dirty="0"/>
+          </a:p>
+          <a:p>
+            <a:pPr algn="l" marL="342900" indent="-342900">
+              <a:lnSpc>
+                <a:spcPts val="1620"/>
+              </a:lnSpc>
+              <a:spcAft>
+                <a:spcPts val="300"/>
+              </a:spcAft>
+              <a:buSzPct val="100000"/>
+              <a:buChar char="•"/>
             </a:pPr>
             <a:r>
               <a:rPr lang="en-US" sz="1200" dirty="0">
@@ -4634,15 +5343,63 @@
                 <a:ea typeface="Georgia" pitchFamily="34" charset="-122"/>
                 <a:cs typeface="Georgia" pitchFamily="34" charset="-120"/>
               </a:rPr>
-              <a:t>). Today's slice: focus on the part of the activity that reinforces Stair-Step Method (Nārāyaṇa).</a:t>
+              <a:t>Step 3: If you go off the top, wrap to the bottom (same column you'd have landed in).</a:t>
             </a:r>
             <a:endParaRPr lang="en-US" sz="1200" dirty="0"/>
           </a:p>
-        </p:txBody>
-      </p:sp>
-      <p:sp>
-        <p:nvSpPr>
-          <p:cNvPr id="5" name="Text 3"/>
+          <a:p>
+            <a:pPr algn="l" marL="342900" indent="-342900">
+              <a:lnSpc>
+                <a:spcPts val="1620"/>
+              </a:lnSpc>
+              <a:spcAft>
+                <a:spcPts val="300"/>
+              </a:spcAft>
+              <a:buSzPct val="100000"/>
+              <a:buChar char="•"/>
+            </a:pPr>
+            <a:r>
+              <a:rPr lang="en-US" sz="1200" dirty="0">
+                <a:solidFill>
+                  <a:srgbClr val="1A1A1A"/>
+                </a:solidFill>
+                <a:latin typeface="Georgia" pitchFamily="34" charset="0"/>
+                <a:ea typeface="Georgia" pitchFamily="34" charset="-122"/>
+                <a:cs typeface="Georgia" pitchFamily="34" charset="-120"/>
+              </a:rPr>
+              <a:t>Step 4: If you go off the right, wrap to the left (same row).</a:t>
+            </a:r>
+            <a:endParaRPr lang="en-US" sz="1200" dirty="0"/>
+          </a:p>
+          <a:p>
+            <a:pPr algn="l" marL="342900" indent="-342900">
+              <a:lnSpc>
+                <a:spcPts val="1620"/>
+              </a:lnSpc>
+              <a:spcAft>
+                <a:spcPts val="300"/>
+              </a:spcAft>
+              <a:buSzPct val="100000"/>
+              <a:buChar char="•"/>
+            </a:pPr>
+            <a:r>
+              <a:rPr lang="en-US" sz="1200" dirty="0">
+                <a:solidFill>
+                  <a:srgbClr val="1A1A1A"/>
+                </a:solidFill>
+                <a:latin typeface="Georgia" pitchFamily="34" charset="0"/>
+                <a:ea typeface="Georgia" pitchFamily="34" charset="-122"/>
+                <a:cs typeface="Georgia" pitchFamily="34" charset="-120"/>
+              </a:rPr>
+              <a:t>Step 5: If the target cell is occupied, place k+1 in the cell DIRECTLY BELOW the cell containing k instead.</a:t>
+            </a:r>
+            <a:endParaRPr lang="en-US" sz="1200" dirty="0"/>
+          </a:p>
+        </p:txBody>
+      </p:sp>
+      <p:sp>
+        <p:nvSpPr>
+          <p:cNvPr id="6" name="Text 4"/>
           <p:cNvSpPr/>
           <p:nvPr/>
         </p:nvSpPr>
@@ -4792,7 +5549,7 @@
                 <a:ea typeface="Times New Roman" pitchFamily="34" charset="-122"/>
                 <a:cs typeface="Times New Roman" pitchFamily="34" charset="-120"/>
               </a:rPr>
-              <a:t>Wrap-up (5 min)</a:t>
+              <a:t>Core (20 min) (cont.)</a:t>
             </a:r>
             <a:endParaRPr lang="en-US" sz="1800" dirty="0"/>
           </a:p>
@@ -4806,8 +5563,8 @@
         </p:nvSpPr>
         <p:spPr>
           <a:xfrm>
-            <a:off x="406301" y="870942"/>
-            <a:ext cx="8498026" cy="213271"/>
+            <a:off x="634901" y="883593"/>
+            <a:ext cx="8102798" cy="487561"/>
           </a:xfrm>
           <a:prstGeom prst="rect">
             <a:avLst/>
@@ -4819,13 +5576,31 @@
           <a:bodyPr wrap="square" lIns="0" tIns="0" rIns="0" bIns="0" rtlCol="0" anchor="t"/>
           <a:lstStyle/>
           <a:p>
+            <a:pPr algn="l" marL="342900" indent="-342900">
+              <a:lnSpc>
+                <a:spcPts val="1620"/>
+              </a:lnSpc>
+              <a:spcAft>
+                <a:spcPts val="300"/>
+              </a:spcAft>
+              <a:buSzPct val="100000"/>
+              <a:buChar char="•"/>
+            </a:pPr>
+            <a:r>
+              <a:rPr lang="en-US" sz="1200" b="1" dirty="0">
+                <a:solidFill>
+                  <a:srgbClr val="1A1A1A"/>
+                </a:solidFill>
+                <a:latin typeface="Georgia" pitchFamily="34" charset="0"/>
+                <a:ea typeface="Georgia" pitchFamily="34" charset="-122"/>
+                <a:cs typeface="Georgia" pitchFamily="34" charset="-120"/>
+              </a:rPr>
+              <a:t>Demonstrate on 3×3.</a:t>
+            </a:r>
             <a:pPr algn="l" indent="0" marL="0">
               <a:lnSpc>
-                <a:spcPts val="1680"/>
-              </a:lnSpc>
-              <a:spcBef>
-                <a:spcPts val="300"/>
-              </a:spcBef>
+                <a:spcPts val="1620"/>
+              </a:lnSpc>
               <a:spcAft>
                 <a:spcPts val="300"/>
               </a:spcAft>
@@ -4840,61 +5615,194 @@
                 <a:ea typeface="Georgia" pitchFamily="34" charset="-122"/>
                 <a:cs typeface="Georgia" pitchFamily="34" charset="-120"/>
               </a:rPr>
-              <a:t>– One-sentence exit ticket: </a:t>
-            </a:r>
+              <a:t> Place 1 top-middle. Move up-right (wraps to bottom row, same column shift) → 2 goes bottom-right. Continue:</a:t>
+            </a:r>
+            <a:endParaRPr lang="en-US" sz="1200" dirty="0"/>
+          </a:p>
+        </p:txBody>
+      </p:sp>
+      <p:sp>
+        <p:nvSpPr>
+          <p:cNvPr id="5" name="Text 3"/>
+          <p:cNvSpPr/>
+          <p:nvPr/>
+        </p:nvSpPr>
+        <p:spPr>
+          <a:xfrm>
+            <a:off x="406301" y="1472654"/>
+            <a:ext cx="8331398" cy="777627"/>
+          </a:xfrm>
+          <a:prstGeom prst="rect">
+            <a:avLst/>
+          </a:prstGeom>
+          <a:solidFill>
+            <a:srgbClr val="FFFFFF"/>
+          </a:solidFill>
+          <a:ln/>
+        </p:spPr>
+        <p:txBody>
+          <a:bodyPr wrap="square" rtlCol="0" anchor="ctr"/>
+          <a:lstStyle/>
+          <a:p>
+            <a:pPr indent="0" marL="0">
+              <a:buNone/>
+            </a:pPr>
+            <a:endParaRPr lang="en-US" dirty="0"/>
+          </a:p>
+        </p:txBody>
+      </p:sp>
+      <p:sp>
+        <p:nvSpPr>
+          <p:cNvPr id="6" name="Shape 4"/>
+          <p:cNvSpPr/>
+          <p:nvPr/>
+        </p:nvSpPr>
+        <p:spPr>
+          <a:xfrm>
+            <a:off x="430113" y="1472654"/>
+            <a:ext cx="0" cy="777627"/>
+          </a:xfrm>
+          <a:prstGeom prst="line">
+            <a:avLst/>
+          </a:prstGeom>
+          <a:noFill/>
+          <a:ln w="47625">
+            <a:solidFill>
+              <a:srgbClr val="5D1D2E"/>
+            </a:solidFill>
+            <a:prstDash val="solid"/>
+          </a:ln>
+        </p:spPr>
+      </p:sp>
+      <p:sp>
+        <p:nvSpPr>
+          <p:cNvPr id="7" name="Text 5"/>
+          <p:cNvSpPr/>
+          <p:nvPr/>
+        </p:nvSpPr>
+        <p:spPr>
+          <a:xfrm>
+            <a:off x="631627" y="1599605"/>
+            <a:ext cx="8086939" cy="174575"/>
+          </a:xfrm>
+          <a:prstGeom prst="rect">
+            <a:avLst/>
+          </a:prstGeom>
+          <a:noFill/>
+          <a:ln/>
+        </p:spPr>
+        <p:txBody>
+          <a:bodyPr wrap="square" lIns="0" tIns="0" rIns="0" bIns="0" rtlCol="0" anchor="t"/>
+          <a:lstStyle/>
+          <a:p>
             <a:pPr algn="l" indent="0" marL="0">
               <a:lnSpc>
-                <a:spcPts val="1680"/>
-              </a:lnSpc>
-              <a:spcBef>
-                <a:spcPts val="300"/>
-              </a:spcBef>
-              <a:spcAft>
-                <a:spcPts val="300"/>
-              </a:spcAft>
-              <a:buNone/>
-            </a:pPr>
-            <a:r>
-              <a:rPr lang="en-US" sz="1200" i="1" dirty="0">
-                <a:solidFill>
-                  <a:srgbClr val="1A1A1A"/>
-                </a:solidFill>
-                <a:latin typeface="Georgia" pitchFamily="34" charset="0"/>
-                <a:ea typeface="Georgia" pitchFamily="34" charset="-122"/>
-                <a:cs typeface="Georgia" pitchFamily="34" charset="-120"/>
-              </a:rPr>
-              <a:t>"What's one thing you learned today?"</a:t>
-            </a:r>
+                <a:spcPts val="1375"/>
+              </a:lnSpc>
+              <a:buNone/>
+            </a:pPr>
+            <a:r>
+              <a:rPr lang="en-US" sz="1100" dirty="0">
+                <a:solidFill>
+                  <a:srgbClr val="1A1A1A"/>
+                </a:solidFill>
+                <a:latin typeface="Courier New" pitchFamily="34" charset="0"/>
+                <a:ea typeface="Courier New" pitchFamily="34" charset="-122"/>
+                <a:cs typeface="Courier New" pitchFamily="34" charset="-120"/>
+              </a:rPr>
+              <a:t>8 1 6</a:t>
+            </a:r>
+            <a:endParaRPr lang="en-US" sz="1100" dirty="0"/>
+          </a:p>
+        </p:txBody>
+      </p:sp>
+      <p:sp>
+        <p:nvSpPr>
+          <p:cNvPr id="8" name="Text 6"/>
+          <p:cNvSpPr/>
+          <p:nvPr/>
+        </p:nvSpPr>
+        <p:spPr>
+          <a:xfrm>
+            <a:off x="631627" y="1774180"/>
+            <a:ext cx="8086939" cy="174575"/>
+          </a:xfrm>
+          <a:prstGeom prst="rect">
+            <a:avLst/>
+          </a:prstGeom>
+          <a:noFill/>
+          <a:ln/>
+        </p:spPr>
+        <p:txBody>
+          <a:bodyPr wrap="square" lIns="0" tIns="0" rIns="0" bIns="0" rtlCol="0" anchor="t"/>
+          <a:lstStyle/>
+          <a:p>
             <a:pPr algn="l" indent="0" marL="0">
               <a:lnSpc>
-                <a:spcPts val="1680"/>
-              </a:lnSpc>
-              <a:spcBef>
-                <a:spcPts val="300"/>
-              </a:spcBef>
-              <a:spcAft>
-                <a:spcPts val="300"/>
-              </a:spcAft>
-              <a:buNone/>
-            </a:pPr>
-            <a:r>
-              <a:rPr lang="en-US" sz="1200" dirty="0">
-                <a:solidFill>
-                  <a:srgbClr val="1A1A1A"/>
-                </a:solidFill>
-                <a:latin typeface="Georgia" pitchFamily="34" charset="0"/>
-                <a:ea typeface="Georgia" pitchFamily="34" charset="-122"/>
-                <a:cs typeface="Georgia" pitchFamily="34" charset="-120"/>
-              </a:rPr>
-              <a:t> – Preview tomorrow.</a:t>
-            </a:r>
-            <a:endParaRPr lang="en-US" sz="1200" dirty="0"/>
-          </a:p>
-        </p:txBody>
-      </p:sp>
-      <p:sp>
-        <p:nvSpPr>
-          <p:cNvPr id="5" name="Text 3"/>
+                <a:spcPts val="1375"/>
+              </a:lnSpc>
+              <a:buNone/>
+            </a:pPr>
+            <a:r>
+              <a:rPr lang="en-US" sz="1100" dirty="0">
+                <a:solidFill>
+                  <a:srgbClr val="1A1A1A"/>
+                </a:solidFill>
+                <a:latin typeface="Courier New" pitchFamily="34" charset="0"/>
+                <a:ea typeface="Courier New" pitchFamily="34" charset="-122"/>
+                <a:cs typeface="Courier New" pitchFamily="34" charset="-120"/>
+              </a:rPr>
+              <a:t>3 5 7</a:t>
+            </a:r>
+            <a:endParaRPr lang="en-US" sz="1100" dirty="0"/>
+          </a:p>
+        </p:txBody>
+      </p:sp>
+      <p:sp>
+        <p:nvSpPr>
+          <p:cNvPr id="9" name="Text 7"/>
+          <p:cNvSpPr/>
+          <p:nvPr/>
+        </p:nvSpPr>
+        <p:spPr>
+          <a:xfrm>
+            <a:off x="631627" y="1948755"/>
+            <a:ext cx="8086939" cy="174575"/>
+          </a:xfrm>
+          <a:prstGeom prst="rect">
+            <a:avLst/>
+          </a:prstGeom>
+          <a:noFill/>
+          <a:ln/>
+        </p:spPr>
+        <p:txBody>
+          <a:bodyPr wrap="square" lIns="0" tIns="0" rIns="0" bIns="0" rtlCol="0" anchor="t"/>
+          <a:lstStyle/>
+          <a:p>
+            <a:pPr algn="l" indent="0" marL="0">
+              <a:lnSpc>
+                <a:spcPts val="1375"/>
+              </a:lnSpc>
+              <a:buNone/>
+            </a:pPr>
+            <a:r>
+              <a:rPr lang="en-US" sz="1100" dirty="0">
+                <a:solidFill>
+                  <a:srgbClr val="1A1A1A"/>
+                </a:solidFill>
+                <a:latin typeface="Courier New" pitchFamily="34" charset="0"/>
+                <a:ea typeface="Courier New" pitchFamily="34" charset="-122"/>
+                <a:cs typeface="Courier New" pitchFamily="34" charset="-120"/>
+              </a:rPr>
+              <a:t>4 9 2</a:t>
+            </a:r>
+            <a:endParaRPr lang="en-US" sz="1100" dirty="0"/>
+          </a:p>
+        </p:txBody>
+      </p:sp>
+      <p:sp>
+        <p:nvSpPr>
+          <p:cNvPr id="10" name="Text 8"/>
           <p:cNvSpPr/>
           <p:nvPr/>
         </p:nvSpPr>
@@ -5044,7 +5952,7 @@
                 <a:ea typeface="Times New Roman" pitchFamily="34" charset="-122"/>
                 <a:cs typeface="Times New Roman" pitchFamily="34" charset="-120"/>
               </a:rPr>
-              <a:t>Homework</a:t>
+              <a:t>Core (20 min) (cont.)</a:t>
             </a:r>
             <a:endParaRPr lang="en-US" sz="1800" dirty="0"/>
           </a:p>
@@ -5059,7 +5967,7 @@
         <p:spPr>
           <a:xfrm>
             <a:off x="406301" y="870942"/>
-            <a:ext cx="8498026" cy="222796"/>
+            <a:ext cx="8498026" cy="426541"/>
           </a:xfrm>
           <a:prstGeom prst="rect">
             <a:avLst/>
@@ -5092,15 +6000,58 @@
                 <a:ea typeface="Georgia" pitchFamily="34" charset="-122"/>
                 <a:cs typeface="Georgia" pitchFamily="34" charset="-120"/>
               </a:rPr>
-              <a:t>(See </a:t>
+              <a:t>Verify: rows, columns, diagonals all = 15. ✓ (Note: this is a different symmetric variant of the 3×3 magic square than yesterday's.)</a:t>
+            </a:r>
+            <a:endParaRPr lang="en-US" sz="1200" dirty="0"/>
+          </a:p>
+        </p:txBody>
+      </p:sp>
+      <p:sp>
+        <p:nvSpPr>
+          <p:cNvPr id="5" name="Text 3"/>
+          <p:cNvSpPr/>
+          <p:nvPr/>
+        </p:nvSpPr>
+        <p:spPr>
+          <a:xfrm>
+            <a:off x="634901" y="1386334"/>
+            <a:ext cx="8102798" cy="487561"/>
+          </a:xfrm>
+          <a:prstGeom prst="rect">
+            <a:avLst/>
+          </a:prstGeom>
+          <a:noFill/>
+          <a:ln/>
+        </p:spPr>
+        <p:txBody>
+          <a:bodyPr wrap="square" lIns="0" tIns="0" rIns="0" bIns="0" rtlCol="0" anchor="t"/>
+          <a:lstStyle/>
+          <a:p>
+            <a:pPr algn="l" marL="342900" indent="-342900">
+              <a:lnSpc>
+                <a:spcPts val="1620"/>
+              </a:lnSpc>
+              <a:spcAft>
+                <a:spcPts val="300"/>
+              </a:spcAft>
+              <a:buSzPct val="100000"/>
+              <a:buChar char="•"/>
+            </a:pPr>
+            <a:r>
+              <a:rPr lang="en-US" sz="1200" b="1" dirty="0">
+                <a:solidFill>
+                  <a:srgbClr val="1A1A1A"/>
+                </a:solidFill>
+                <a:latin typeface="Georgia" pitchFamily="34" charset="0"/>
+                <a:ea typeface="Georgia" pitchFamily="34" charset="-122"/>
+                <a:cs typeface="Georgia" pitchFamily="34" charset="-120"/>
+              </a:rPr>
+              <a:t>Source.</a:t>
             </a:r>
             <a:pPr algn="l" indent="0" marL="0">
               <a:lnSpc>
-                <a:spcPts val="1680"/>
-              </a:lnSpc>
-              <a:spcBef>
-                <a:spcPts val="300"/>
-              </a:spcBef>
+                <a:spcPts val="1620"/>
+              </a:lnSpc>
               <a:spcAft>
                 <a:spcPts val="300"/>
               </a:spcAft>
@@ -5115,15 +6066,32 @@
                 <a:ea typeface="Georgia" pitchFamily="34" charset="-122"/>
                 <a:cs typeface="Georgia" pitchFamily="34" charset="-120"/>
               </a:rPr>
-              <a:t>homework.md</a:t>
+              <a:t> Nārāyaṇa Paṇḍita's </a:t>
             </a:r>
             <a:pPr algn="l" indent="0" marL="0">
               <a:lnSpc>
-                <a:spcPts val="1680"/>
-              </a:lnSpc>
-              <a:spcBef>
-                <a:spcPts val="300"/>
-              </a:spcBef>
+                <a:spcPts val="1620"/>
+              </a:lnSpc>
+              <a:spcAft>
+                <a:spcPts val="300"/>
+              </a:spcAft>
+              <a:buNone/>
+            </a:pPr>
+            <a:r>
+              <a:rPr lang="en-US" sz="1200" i="1" dirty="0">
+                <a:solidFill>
+                  <a:srgbClr val="1A1A1A"/>
+                </a:solidFill>
+                <a:latin typeface="Georgia" pitchFamily="34" charset="0"/>
+                <a:ea typeface="Georgia" pitchFamily="34" charset="-122"/>
+                <a:cs typeface="Georgia" pitchFamily="34" charset="-120"/>
+              </a:rPr>
+              <a:t>Gaṇita-kaumudī</a:t>
+            </a:r>
+            <a:pPr algn="l" indent="0" marL="0">
+              <a:lnSpc>
+                <a:spcPts val="1620"/>
+              </a:lnSpc>
               <a:spcAft>
                 <a:spcPts val="300"/>
               </a:spcAft>
@@ -5138,7 +6106,87 @@
                 <a:ea typeface="Georgia" pitchFamily="34" charset="-122"/>
                 <a:cs typeface="Georgia" pitchFamily="34" charset="-120"/>
               </a:rPr>
-              <a:t> for today's task.)</a:t>
+              <a:t> (1356 CE), Book 14 (</a:t>
+            </a:r>
+            <a:pPr algn="l" indent="0" marL="0">
+              <a:lnSpc>
+                <a:spcPts val="1620"/>
+              </a:lnSpc>
+              <a:spcAft>
+                <a:spcPts val="300"/>
+              </a:spcAft>
+              <a:buNone/>
+            </a:pPr>
+            <a:r>
+              <a:rPr lang="en-US" sz="1200" i="1" dirty="0">
+                <a:solidFill>
+                  <a:srgbClr val="1A1A1A"/>
+                </a:solidFill>
+                <a:latin typeface="Georgia" pitchFamily="34" charset="0"/>
+                <a:ea typeface="Georgia" pitchFamily="34" charset="-122"/>
+                <a:cs typeface="Georgia" pitchFamily="34" charset="-120"/>
+              </a:rPr>
+              <a:t>Bhadra-gaṇita</a:t>
+            </a:r>
+            <a:pPr algn="l" indent="0" marL="0">
+              <a:lnSpc>
+                <a:spcPts val="1620"/>
+              </a:lnSpc>
+              <a:spcAft>
+                <a:spcPts val="300"/>
+              </a:spcAft>
+              <a:buNone/>
+            </a:pPr>
+            <a:r>
+              <a:rPr lang="en-US" sz="1200" dirty="0">
+                <a:solidFill>
+                  <a:srgbClr val="1A1A1A"/>
+                </a:solidFill>
+                <a:latin typeface="Georgia" pitchFamily="34" charset="0"/>
+                <a:ea typeface="Georgia" pitchFamily="34" charset="-122"/>
+                <a:cs typeface="Georgia" pitchFamily="34" charset="-120"/>
+              </a:rPr>
+              <a:t>). He calls this method </a:t>
+            </a:r>
+            <a:pPr algn="l" indent="0" marL="0">
+              <a:lnSpc>
+                <a:spcPts val="1620"/>
+              </a:lnSpc>
+              <a:spcAft>
+                <a:spcPts val="300"/>
+              </a:spcAft>
+              <a:buNone/>
+            </a:pPr>
+            <a:r>
+              <a:rPr lang="en-US" sz="1200" i="1" dirty="0">
+                <a:solidFill>
+                  <a:srgbClr val="1A1A1A"/>
+                </a:solidFill>
+                <a:latin typeface="Georgia" pitchFamily="34" charset="0"/>
+                <a:ea typeface="Georgia" pitchFamily="34" charset="-122"/>
+                <a:cs typeface="Georgia" pitchFamily="34" charset="-120"/>
+              </a:rPr>
+              <a:t>turagagati</a:t>
+            </a:r>
+            <a:pPr algn="l" indent="0" marL="0">
+              <a:lnSpc>
+                <a:spcPts val="1620"/>
+              </a:lnSpc>
+              <a:spcAft>
+                <a:spcPts val="300"/>
+              </a:spcAft>
+              <a:buNone/>
+            </a:pPr>
+            <a:r>
+              <a:rPr lang="en-US" sz="1200" dirty="0">
+                <a:solidFill>
+                  <a:srgbClr val="1A1A1A"/>
+                </a:solidFill>
+                <a:latin typeface="Georgia" pitchFamily="34" charset="0"/>
+                <a:ea typeface="Georgia" pitchFamily="34" charset="-122"/>
+                <a:cs typeface="Georgia" pitchFamily="34" charset="-120"/>
+              </a:rPr>
+              <a:t> — "horse-step" (knight-like move).</a:t>
             </a:r>
             <a:endParaRPr lang="en-US" sz="1200" dirty="0"/>
           </a:p>
@@ -5146,7 +6194,7 @@
       </p:sp>
       <p:sp>
         <p:nvSpPr>
-          <p:cNvPr id="5" name="Text 3"/>
+          <p:cNvPr id="6" name="Text 4"/>
           <p:cNvSpPr/>
           <p:nvPr/>
         </p:nvSpPr>
